--- a/redes_neurais/slides/cap07_Levenberg_Marquardt.pptx
+++ b/redes_neurais/slides/cap07_Levenberg_Marquardt.pptx
@@ -18,9 +18,15 @@
     <p:sldId id="266" r:id="rId12"/>
     <p:sldId id="267" r:id="rId13"/>
     <p:sldId id="268" r:id="rId14"/>
+    <p:sldId id="269" r:id="rId15"/>
+    <p:sldId id="270" r:id="rId16"/>
+    <p:sldId id="271" r:id="rId17"/>
+    <p:sldId id="272" r:id="rId18"/>
+    <p:sldId id="273" r:id="rId19"/>
+    <p:sldId id="274" r:id="rId20"/>
   </p:sldIdLst>
   <p:notesMasterIdLst>
-    <p:notesMasterId r:id="rId15"/>
+    <p:notesMasterId r:id="rId21"/>
   </p:notesMasterIdLst>
   <p:sldSz cx="9144000" cy="5143500"/>
   <p:notesSz cx="5143500" cy="9144000"/>
@@ -602,7 +608,7 @@
           <a:p>
             <a:r>
               <a:rPr lang="en-US" dirty="0"/>
-              <a:t>Cuidado: uma iteração de LM custa muito mais; número de iterações não mede tempo.</a:t>
+              <a:t>Ponte entre os dois mundos: μ pequeno ≈ GN; μ grande ≈ gradiente.</a:t>
             </a:r>
             <a:endParaRPr lang="en-US" dirty="0"/>
           </a:p>
@@ -690,7 +696,7 @@
           <a:p>
             <a:r>
               <a:rPr lang="en-US" dirty="0"/>
-              <a:t>Fatores prováveis, não testados: erro quadrático em saídas sigmoides e sobreajuste rápido.</a:t>
+              <a:t>Exemplo do livro: digits, P = 760, J com 65,5 MB. MNIST: ≈ 38,4 GB só para J (inviável).</a:t>
             </a:r>
             <a:endParaRPr lang="en-US" dirty="0"/>
           </a:p>
@@ -778,7 +784,7 @@
           <a:p>
             <a:r>
               <a:rPr lang="en-US" dirty="0"/>
-              <a:t>g = (1,5; −1,5); JᵀJ = [[2,1],[1,5]]. Resolva os dois sistemas; o passo de LM é menor.</a:t>
+              <a:t>Cuidado: uma iteração de LM custa muito mais; número de iterações não mede tempo.</a:t>
             </a:r>
             <a:endParaRPr lang="en-US" dirty="0"/>
           </a:p>
@@ -866,7 +872,7 @@
           <a:p>
             <a:r>
               <a:rPr lang="en-US" dirty="0"/>
-              <a:t>Último capítulo: adaptar taxas por peso (Delta-Bar-Delta).</a:t>
+              <a:t>Fatores prováveis, não testados: erro quadrático em saídas sigmoides e sobreajuste rápido.</a:t>
             </a:r>
             <a:endParaRPr lang="en-US" dirty="0"/>
           </a:p>
@@ -890,6 +896,534 @@
             <a:fld id="{F7021451-1387-4CA6-816F-3879F97B5CBC}" type="slidenum">
               <a:rPr lang="en-US"/>
               <a:t>13</a:t>
+            </a:fld>
+            <a:endParaRPr lang="en-US"/>
+          </a:p>
+        </p:txBody>
+      </p:sp>
+    </p:spTree>
+    <p:extLst>
+      <p:ext uri="{BB962C8B-B14F-4D97-AF65-F5344CB8AC3E}">
+        <p14:creationId xmlns:p14="http://schemas.microsoft.com/office/powerpoint/2010/main" val="1024086991"/>
+      </p:ext>
+    </p:extLst>
+  </p:cSld>
+  <p:clrMapOvr>
+    <a:masterClrMapping/>
+  </p:clrMapOvr>
+</p:notes>
+</file>
+
+<file path=ppt/notesSlides/notesSlide14.xml><?xml version="1.0" encoding="utf-8"?>
+<p:notes xmlns:a="http://schemas.openxmlformats.org/drawingml/2006/main" xmlns:r="http://schemas.openxmlformats.org/officeDocument/2006/relationships" xmlns:p="http://schemas.openxmlformats.org/presentationml/2006/main">
+  <p:cSld>
+    <p:spTree>
+      <p:nvGrpSpPr>
+        <p:cNvPr id="1" name=""/>
+        <p:cNvGrpSpPr/>
+        <p:nvPr/>
+      </p:nvGrpSpPr>
+      <p:grpSpPr>
+        <a:xfrm>
+          <a:off x="0" y="0"/>
+          <a:ext cx="0" cy="0"/>
+          <a:chOff x="0" y="0"/>
+          <a:chExt cx="0" cy="0"/>
+        </a:xfrm>
+      </p:grpSpPr>
+      <p:sp>
+        <p:nvSpPr>
+          <p:cNvPr id="2" name="Slide Image Placeholder 1"/>
+          <p:cNvSpPr>
+            <a:spLocks noGrp="1" noRot="1" noChangeAspect="1"/>
+          </p:cNvSpPr>
+          <p:nvPr>
+            <p:ph type="sldImg"/>
+          </p:nvPr>
+        </p:nvSpPr>
+        <p:spPr/>
+      </p:sp>
+      <p:sp>
+        <p:nvSpPr>
+          <p:cNvPr id="3" name="Notes Placeholder 2"/>
+          <p:cNvSpPr>
+            <a:spLocks noGrp="1"/>
+          </p:cNvSpPr>
+          <p:nvPr>
+            <p:ph type="body" idx="1"/>
+          </p:nvPr>
+        </p:nvSpPr>
+        <p:spPr/>
+        <p:txBody>
+          <a:bodyPr/>
+          <a:lstStyle/>
+          <a:p>
+            <a:r>
+              <a:rPr lang="en-US" dirty="0"/>
+              <a:t>No exemplo digits (P = 760), J ocupou 65,5 MB. Para o MNIST seriam ≈ 38,4 GB só para J.</a:t>
+            </a:r>
+            <a:endParaRPr lang="en-US" dirty="0"/>
+          </a:p>
+        </p:txBody>
+      </p:sp>
+      <p:sp>
+        <p:nvSpPr>
+          <p:cNvPr id="4" name="Slide Number Placeholder 3"/>
+          <p:cNvSpPr>
+            <a:spLocks noGrp="1"/>
+          </p:cNvSpPr>
+          <p:nvPr>
+            <p:ph type="sldNum" sz="quarter" idx="10"/>
+          </p:nvPr>
+        </p:nvSpPr>
+        <p:spPr/>
+        <p:txBody>
+          <a:bodyPr/>
+          <a:lstStyle/>
+          <a:p>
+            <a:fld id="{F7021451-1387-4CA6-816F-3879F97B5CBC}" type="slidenum">
+              <a:rPr lang="en-US"/>
+              <a:t>14</a:t>
+            </a:fld>
+            <a:endParaRPr lang="en-US"/>
+          </a:p>
+        </p:txBody>
+      </p:sp>
+    </p:spTree>
+    <p:extLst>
+      <p:ext uri="{BB962C8B-B14F-4D97-AF65-F5344CB8AC3E}">
+        <p14:creationId xmlns:p14="http://schemas.microsoft.com/office/powerpoint/2010/main" val="1024086991"/>
+      </p:ext>
+    </p:extLst>
+  </p:cSld>
+  <p:clrMapOvr>
+    <a:masterClrMapping/>
+  </p:clrMapOvr>
+</p:notes>
+</file>
+
+<file path=ppt/notesSlides/notesSlide15.xml><?xml version="1.0" encoding="utf-8"?>
+<p:notes xmlns:a="http://schemas.openxmlformats.org/drawingml/2006/main" xmlns:r="http://schemas.openxmlformats.org/officeDocument/2006/relationships" xmlns:p="http://schemas.openxmlformats.org/presentationml/2006/main">
+  <p:cSld>
+    <p:spTree>
+      <p:nvGrpSpPr>
+        <p:cNvPr id="1" name=""/>
+        <p:cNvGrpSpPr/>
+        <p:nvPr/>
+      </p:nvGrpSpPr>
+      <p:grpSpPr>
+        <a:xfrm>
+          <a:off x="0" y="0"/>
+          <a:ext cx="0" cy="0"/>
+          <a:chOff x="0" y="0"/>
+          <a:chExt cx="0" cy="0"/>
+        </a:xfrm>
+      </p:grpSpPr>
+      <p:sp>
+        <p:nvSpPr>
+          <p:cNvPr id="2" name="Slide Image Placeholder 1"/>
+          <p:cNvSpPr>
+            <a:spLocks noGrp="1" noRot="1" noChangeAspect="1"/>
+          </p:cNvSpPr>
+          <p:nvPr>
+            <p:ph type="sldImg"/>
+          </p:nvPr>
+        </p:nvSpPr>
+        <p:spPr/>
+      </p:sp>
+      <p:sp>
+        <p:nvSpPr>
+          <p:cNvPr id="3" name="Notes Placeholder 2"/>
+          <p:cNvSpPr>
+            <a:spLocks noGrp="1"/>
+          </p:cNvSpPr>
+          <p:nvPr>
+            <p:ph type="body" idx="1"/>
+          </p:nvPr>
+        </p:nvSpPr>
+        <p:spPr/>
+        <p:txBody>
+          <a:bodyPr/>
+          <a:lstStyle/>
+          <a:p>
+            <a:r>
+              <a:rPr lang="en-US" dirty="0"/>
+              <a:t>Resposta: A) Definida positiva. Autovalores λᵢ + μ ≥ μ &gt; 0: o sistema sempre tem solução e o passo é de descida. Dê um minuto para votação antes de revelar.</a:t>
+            </a:r>
+            <a:endParaRPr lang="en-US" dirty="0"/>
+          </a:p>
+        </p:txBody>
+      </p:sp>
+      <p:sp>
+        <p:nvSpPr>
+          <p:cNvPr id="4" name="Slide Number Placeholder 3"/>
+          <p:cNvSpPr>
+            <a:spLocks noGrp="1"/>
+          </p:cNvSpPr>
+          <p:nvPr>
+            <p:ph type="sldNum" sz="quarter" idx="10"/>
+          </p:nvPr>
+        </p:nvSpPr>
+        <p:spPr/>
+        <p:txBody>
+          <a:bodyPr/>
+          <a:lstStyle/>
+          <a:p>
+            <a:fld id="{F7021451-1387-4CA6-816F-3879F97B5CBC}" type="slidenum">
+              <a:rPr lang="en-US"/>
+              <a:t>15</a:t>
+            </a:fld>
+            <a:endParaRPr lang="en-US"/>
+          </a:p>
+        </p:txBody>
+      </p:sp>
+    </p:spTree>
+    <p:extLst>
+      <p:ext uri="{BB962C8B-B14F-4D97-AF65-F5344CB8AC3E}">
+        <p14:creationId xmlns:p14="http://schemas.microsoft.com/office/powerpoint/2010/main" val="1024086991"/>
+      </p:ext>
+    </p:extLst>
+  </p:cSld>
+  <p:clrMapOvr>
+    <a:masterClrMapping/>
+  </p:clrMapOvr>
+</p:notes>
+</file>
+
+<file path=ppt/notesSlides/notesSlide16.xml><?xml version="1.0" encoding="utf-8"?>
+<p:notes xmlns:a="http://schemas.openxmlformats.org/drawingml/2006/main" xmlns:r="http://schemas.openxmlformats.org/officeDocument/2006/relationships" xmlns:p="http://schemas.openxmlformats.org/presentationml/2006/main">
+  <p:cSld>
+    <p:spTree>
+      <p:nvGrpSpPr>
+        <p:cNvPr id="1" name=""/>
+        <p:cNvGrpSpPr/>
+        <p:nvPr/>
+      </p:nvGrpSpPr>
+      <p:grpSpPr>
+        <a:xfrm>
+          <a:off x="0" y="0"/>
+          <a:ext cx="0" cy="0"/>
+          <a:chOff x="0" y="0"/>
+          <a:chExt cx="0" cy="0"/>
+        </a:xfrm>
+      </p:grpSpPr>
+      <p:sp>
+        <p:nvSpPr>
+          <p:cNvPr id="2" name="Slide Image Placeholder 1"/>
+          <p:cNvSpPr>
+            <a:spLocks noGrp="1" noRot="1" noChangeAspect="1"/>
+          </p:cNvSpPr>
+          <p:nvPr>
+            <p:ph type="sldImg"/>
+          </p:nvPr>
+        </p:nvSpPr>
+        <p:spPr/>
+      </p:sp>
+      <p:sp>
+        <p:nvSpPr>
+          <p:cNvPr id="3" name="Notes Placeholder 2"/>
+          <p:cNvSpPr>
+            <a:spLocks noGrp="1"/>
+          </p:cNvSpPr>
+          <p:nvPr>
+            <p:ph type="body" idx="1"/>
+          </p:nvPr>
+        </p:nvSpPr>
+        <p:spPr/>
+        <p:txBody>
+          <a:bodyPr/>
+          <a:lstStyle/>
+          <a:p>
+            <a:r>
+              <a:rPr lang="en-US" dirty="0"/>
+              <a:t>Resposta: A) Soma de quadrados. A aproximação JᵀJ vem de E = ½‖r‖². Dê um minuto para votação antes de revelar.</a:t>
+            </a:r>
+            <a:endParaRPr lang="en-US" dirty="0"/>
+          </a:p>
+        </p:txBody>
+      </p:sp>
+      <p:sp>
+        <p:nvSpPr>
+          <p:cNvPr id="4" name="Slide Number Placeholder 3"/>
+          <p:cNvSpPr>
+            <a:spLocks noGrp="1"/>
+          </p:cNvSpPr>
+          <p:nvPr>
+            <p:ph type="sldNum" sz="quarter" idx="10"/>
+          </p:nvPr>
+        </p:nvSpPr>
+        <p:spPr/>
+        <p:txBody>
+          <a:bodyPr/>
+          <a:lstStyle/>
+          <a:p>
+            <a:fld id="{F7021451-1387-4CA6-816F-3879F97B5CBC}" type="slidenum">
+              <a:rPr lang="en-US"/>
+              <a:t>16</a:t>
+            </a:fld>
+            <a:endParaRPr lang="en-US"/>
+          </a:p>
+        </p:txBody>
+      </p:sp>
+    </p:spTree>
+    <p:extLst>
+      <p:ext uri="{BB962C8B-B14F-4D97-AF65-F5344CB8AC3E}">
+        <p14:creationId xmlns:p14="http://schemas.microsoft.com/office/powerpoint/2010/main" val="1024086991"/>
+      </p:ext>
+    </p:extLst>
+  </p:cSld>
+  <p:clrMapOvr>
+    <a:masterClrMapping/>
+  </p:clrMapOvr>
+</p:notes>
+</file>
+
+<file path=ppt/notesSlides/notesSlide17.xml><?xml version="1.0" encoding="utf-8"?>
+<p:notes xmlns:a="http://schemas.openxmlformats.org/drawingml/2006/main" xmlns:r="http://schemas.openxmlformats.org/officeDocument/2006/relationships" xmlns:p="http://schemas.openxmlformats.org/presentationml/2006/main">
+  <p:cSld>
+    <p:spTree>
+      <p:nvGrpSpPr>
+        <p:cNvPr id="1" name=""/>
+        <p:cNvGrpSpPr/>
+        <p:nvPr/>
+      </p:nvGrpSpPr>
+      <p:grpSpPr>
+        <a:xfrm>
+          <a:off x="0" y="0"/>
+          <a:ext cx="0" cy="0"/>
+          <a:chOff x="0" y="0"/>
+          <a:chExt cx="0" cy="0"/>
+        </a:xfrm>
+      </p:grpSpPr>
+      <p:sp>
+        <p:nvSpPr>
+          <p:cNvPr id="2" name="Slide Image Placeholder 1"/>
+          <p:cNvSpPr>
+            <a:spLocks noGrp="1" noRot="1" noChangeAspect="1"/>
+          </p:cNvSpPr>
+          <p:nvPr>
+            <p:ph type="sldImg"/>
+          </p:nvPr>
+        </p:nvSpPr>
+        <p:spPr/>
+      </p:sp>
+      <p:sp>
+        <p:nvSpPr>
+          <p:cNvPr id="3" name="Notes Placeholder 2"/>
+          <p:cNvSpPr>
+            <a:spLocks noGrp="1"/>
+          </p:cNvSpPr>
+          <p:nvPr>
+            <p:ph type="body" idx="1"/>
+          </p:nvPr>
+        </p:nvSpPr>
+        <p:spPr/>
+        <p:txBody>
+          <a:bodyPr/>
+          <a:lstStyle/>
+          <a:p>
+            <a:r>
+              <a:rPr lang="en-US" dirty="0"/>
+              <a:t>g = (1,5; −1,5); JᵀJ = [[2,1],[1,5]]. Resolva os dois sistemas; o passo de LM é menor.</a:t>
+            </a:r>
+            <a:endParaRPr lang="en-US" dirty="0"/>
+          </a:p>
+        </p:txBody>
+      </p:sp>
+      <p:sp>
+        <p:nvSpPr>
+          <p:cNvPr id="4" name="Slide Number Placeholder 3"/>
+          <p:cNvSpPr>
+            <a:spLocks noGrp="1"/>
+          </p:cNvSpPr>
+          <p:nvPr>
+            <p:ph type="sldNum" sz="quarter" idx="10"/>
+          </p:nvPr>
+        </p:nvSpPr>
+        <p:spPr/>
+        <p:txBody>
+          <a:bodyPr/>
+          <a:lstStyle/>
+          <a:p>
+            <a:fld id="{F7021451-1387-4CA6-816F-3879F97B5CBC}" type="slidenum">
+              <a:rPr lang="en-US"/>
+              <a:t>17</a:t>
+            </a:fld>
+            <a:endParaRPr lang="en-US"/>
+          </a:p>
+        </p:txBody>
+      </p:sp>
+    </p:spTree>
+    <p:extLst>
+      <p:ext uri="{BB962C8B-B14F-4D97-AF65-F5344CB8AC3E}">
+        <p14:creationId xmlns:p14="http://schemas.microsoft.com/office/powerpoint/2010/main" val="1024086991"/>
+      </p:ext>
+    </p:extLst>
+  </p:cSld>
+  <p:clrMapOvr>
+    <a:masterClrMapping/>
+  </p:clrMapOvr>
+</p:notes>
+</file>
+
+<file path=ppt/notesSlides/notesSlide18.xml><?xml version="1.0" encoding="utf-8"?>
+<p:notes xmlns:a="http://schemas.openxmlformats.org/drawingml/2006/main" xmlns:r="http://schemas.openxmlformats.org/officeDocument/2006/relationships" xmlns:p="http://schemas.openxmlformats.org/presentationml/2006/main">
+  <p:cSld>
+    <p:spTree>
+      <p:nvGrpSpPr>
+        <p:cNvPr id="1" name=""/>
+        <p:cNvGrpSpPr/>
+        <p:nvPr/>
+      </p:nvGrpSpPr>
+      <p:grpSpPr>
+        <a:xfrm>
+          <a:off x="0" y="0"/>
+          <a:ext cx="0" cy="0"/>
+          <a:chOff x="0" y="0"/>
+          <a:chExt cx="0" cy="0"/>
+        </a:xfrm>
+      </p:grpSpPr>
+      <p:sp>
+        <p:nvSpPr>
+          <p:cNvPr id="2" name="Slide Image Placeholder 1"/>
+          <p:cNvSpPr>
+            <a:spLocks noGrp="1" noRot="1" noChangeAspect="1"/>
+          </p:cNvSpPr>
+          <p:nvPr>
+            <p:ph type="sldImg"/>
+          </p:nvPr>
+        </p:nvSpPr>
+        <p:spPr/>
+      </p:sp>
+      <p:sp>
+        <p:nvSpPr>
+          <p:cNvPr id="3" name="Notes Placeholder 2"/>
+          <p:cNvSpPr>
+            <a:spLocks noGrp="1"/>
+          </p:cNvSpPr>
+          <p:nvPr>
+            <p:ph type="body" idx="1"/>
+          </p:nvPr>
+        </p:nvSpPr>
+        <p:spPr/>
+        <p:txBody>
+          <a:bodyPr/>
+          <a:lstStyle/>
+          <a:p>
+            <a:r>
+              <a:rPr lang="en-US" dirty="0"/>
+              <a:t>Último capítulo: adaptar taxas por peso (Delta-Bar-Delta).</a:t>
+            </a:r>
+            <a:endParaRPr lang="en-US" dirty="0"/>
+          </a:p>
+        </p:txBody>
+      </p:sp>
+      <p:sp>
+        <p:nvSpPr>
+          <p:cNvPr id="4" name="Slide Number Placeholder 3"/>
+          <p:cNvSpPr>
+            <a:spLocks noGrp="1"/>
+          </p:cNvSpPr>
+          <p:nvPr>
+            <p:ph type="sldNum" sz="quarter" idx="10"/>
+          </p:nvPr>
+        </p:nvSpPr>
+        <p:spPr/>
+        <p:txBody>
+          <a:bodyPr/>
+          <a:lstStyle/>
+          <a:p>
+            <a:fld id="{F7021451-1387-4CA6-816F-3879F97B5CBC}" type="slidenum">
+              <a:rPr lang="en-US"/>
+              <a:t>18</a:t>
+            </a:fld>
+            <a:endParaRPr lang="en-US"/>
+          </a:p>
+        </p:txBody>
+      </p:sp>
+    </p:spTree>
+    <p:extLst>
+      <p:ext uri="{BB962C8B-B14F-4D97-AF65-F5344CB8AC3E}">
+        <p14:creationId xmlns:p14="http://schemas.microsoft.com/office/powerpoint/2010/main" val="1024086991"/>
+      </p:ext>
+    </p:extLst>
+  </p:cSld>
+  <p:clrMapOvr>
+    <a:masterClrMapping/>
+  </p:clrMapOvr>
+</p:notes>
+</file>
+
+<file path=ppt/notesSlides/notesSlide19.xml><?xml version="1.0" encoding="utf-8"?>
+<p:notes xmlns:a="http://schemas.openxmlformats.org/drawingml/2006/main" xmlns:r="http://schemas.openxmlformats.org/officeDocument/2006/relationships" xmlns:p="http://schemas.openxmlformats.org/presentationml/2006/main">
+  <p:cSld>
+    <p:spTree>
+      <p:nvGrpSpPr>
+        <p:cNvPr id="1" name=""/>
+        <p:cNvGrpSpPr/>
+        <p:nvPr/>
+      </p:nvGrpSpPr>
+      <p:grpSpPr>
+        <a:xfrm>
+          <a:off x="0" y="0"/>
+          <a:ext cx="0" cy="0"/>
+          <a:chOff x="0" y="0"/>
+          <a:chExt cx="0" cy="0"/>
+        </a:xfrm>
+      </p:grpSpPr>
+      <p:sp>
+        <p:nvSpPr>
+          <p:cNvPr id="2" name="Slide Image Placeholder 1"/>
+          <p:cNvSpPr>
+            <a:spLocks noGrp="1" noRot="1" noChangeAspect="1"/>
+          </p:cNvSpPr>
+          <p:nvPr>
+            <p:ph type="sldImg"/>
+          </p:nvPr>
+        </p:nvSpPr>
+        <p:spPr/>
+      </p:sp>
+      <p:sp>
+        <p:nvSpPr>
+          <p:cNvPr id="3" name="Notes Placeholder 2"/>
+          <p:cNvSpPr>
+            <a:spLocks noGrp="1"/>
+          </p:cNvSpPr>
+          <p:nvPr>
+            <p:ph type="body" idx="1"/>
+          </p:nvPr>
+        </p:nvSpPr>
+        <p:spPr/>
+        <p:txBody>
+          <a:bodyPr/>
+          <a:lstStyle/>
+          <a:p>
+            <a:r>
+              <a:rPr lang="en-US" dirty="0"/>
+              <a:t>Feche com a frase e peça que os estudantes a expliquem com as próprias palavras.</a:t>
+            </a:r>
+            <a:endParaRPr lang="en-US" dirty="0"/>
+          </a:p>
+        </p:txBody>
+      </p:sp>
+      <p:sp>
+        <p:nvSpPr>
+          <p:cNvPr id="4" name="Slide Number Placeholder 3"/>
+          <p:cNvSpPr>
+            <a:spLocks noGrp="1"/>
+          </p:cNvSpPr>
+          <p:nvPr>
+            <p:ph type="sldNum" sz="quarter" idx="10"/>
+          </p:nvPr>
+        </p:nvSpPr>
+        <p:spPr/>
+        <p:txBody>
+          <a:bodyPr/>
+          <a:lstStyle/>
+          <a:p>
+            <a:fld id="{F7021451-1387-4CA6-816F-3879F97B5CBC}" type="slidenum">
+              <a:rPr lang="en-US"/>
+              <a:t>19</a:t>
             </a:fld>
             <a:endParaRPr lang="en-US"/>
           </a:p>
@@ -954,7 +1488,7 @@
           <a:p>
             <a:r>
               <a:rPr lang="en-US" dirty="0"/>
-              <a:t>O ponto-chave: o erro é uma soma de quadrados; isso permite aproximar a curvatura com primeiras derivadas.</a:t>
+              <a:t>Apresente o roteiro e o tempo estimado de cada bloco (cerca de 2 minutos por slide).</a:t>
             </a:r>
             <a:endParaRPr lang="en-US" dirty="0"/>
           </a:p>
@@ -1042,7 +1576,7 @@
           <a:p>
             <a:r>
               <a:rPr lang="en-US" dirty="0"/>
-              <a:t>Condição necessária de mínimo: g = 0 e H semidefinida positiva; suficiente: H definida positiva.</a:t>
+              <a:t>O ponto-chave: o erro é uma soma de quadrados; isso permite aproximar a curvatura com primeiras derivadas.</a:t>
             </a:r>
             <a:endParaRPr lang="en-US" dirty="0"/>
           </a:p>
@@ -1130,7 +1664,7 @@
           <a:p>
             <a:r>
               <a:rPr lang="en-US" dirty="0"/>
-              <a:t>Resultado do livro: na rede 1–8–1 inicial, o autovalor mínimo da Hessiana é −18,5 (indefinida).</a:t>
+              <a:t>Condição necessária de mínimo: g = 0 e H semidefinida positiva; suficiente: H definida positiva.</a:t>
             </a:r>
             <a:endParaRPr lang="en-US" dirty="0"/>
           </a:p>
@@ -1218,7 +1752,7 @@
           <a:p>
             <a:r>
               <a:rPr lang="en-US" dirty="0"/>
-              <a:t>S é pequena se os resíduos são pequenos ou o modelo é quase linear.</a:t>
+              <a:t>Mostre a figura do efeito de μ no comprimento do passo.</a:t>
             </a:r>
             <a:endParaRPr lang="en-US" dirty="0"/>
           </a:p>
@@ -1306,7 +1840,7 @@
           <a:p>
             <a:r>
               <a:rPr lang="en-US" dirty="0"/>
-              <a:t>JᵀJ + μI é definida positiva para μ &gt; 0: o sistema sempre tem solução e d é de descida.</a:t>
+              <a:t>Resultado do livro: na rede 1–8–1 inicial, o autovalor mínimo da Hessiana é −18,5 (indefinida).</a:t>
             </a:r>
             <a:endParaRPr lang="en-US" dirty="0"/>
           </a:p>
@@ -1394,7 +1928,7 @@
           <a:p>
             <a:r>
               <a:rPr lang="en-US" dirty="0"/>
-              <a:t>Livro: Newton 7 iterações, Gauss–Newton 3, LM 28/18 (conforme a variante). Gauss–Newton puro pode explodir em outros problemas.</a:t>
+              <a:t>S é pequena se os resíduos são pequenos ou o modelo é quase linear.</a:t>
             </a:r>
             <a:endParaRPr lang="en-US" dirty="0"/>
           </a:p>
@@ -1482,7 +2016,7 @@
           <a:p>
             <a:r>
               <a:rPr lang="en-US" dirty="0"/>
-              <a:t>Ponte entre os dois mundos: μ pequeno ≈ GN; μ grande ≈ gradiente.</a:t>
+              <a:t>JᵀJ + μI é definida positiva para μ &gt; 0: o sistema sempre tem solução e d é de descida.</a:t>
             </a:r>
             <a:endParaRPr lang="en-US" dirty="0"/>
           </a:p>
@@ -1570,7 +2104,7 @@
           <a:p>
             <a:r>
               <a:rPr lang="en-US" dirty="0"/>
-              <a:t>Exemplo do livro: digits, P = 760, J com 65,5 MB. MNIST: ≈ 38,4 GB só para J (inviável).</a:t>
+              <a:t>Livro: Newton 7 iterações, Gauss–Newton 3, LM 28/18 (conforme a variante). Gauss–Newton puro pode explodir em outros problemas.</a:t>
             </a:r>
             <a:endParaRPr lang="en-US" dirty="0"/>
           </a:p>
@@ -2379,7 +2913,7 @@
                 <a:ea typeface="Calibri" pitchFamily="34" charset="-122"/>
                 <a:cs typeface="Calibri" pitchFamily="34" charset="-120"/>
               </a:rPr>
-              <a:t>Comparação com os demais</a:t>
+              <a:t>Efeito de μ</a:t>
             </a:r>
             <a:endParaRPr lang="en-US" sz="2600" dirty="0"/>
           </a:p>
@@ -2387,7 +2921,7 @@
       </p:sp>
       <p:pic>
         <p:nvPicPr>
-          <p:cNvPr id="3" name="Image 0" descr="Iterações até o piso do ruído (uma execução).">    </p:cNvPr>
+          <p:cNvPr id="3" name="Image 0" descr="Comprimento e direção do passo conforme μ.">    </p:cNvPr>
           <p:cNvPicPr>
             <a:picLocks noChangeAspect="1"/>
           </p:cNvPicPr>
@@ -2401,8 +2935,8 @@
         </p:blipFill>
         <p:spPr>
           <a:xfrm>
-            <a:off x="2171787" y="1005840"/>
-            <a:ext cx="4800425" cy="3154680"/>
+            <a:off x="850931" y="1005840"/>
+            <a:ext cx="7442138" cy="3154680"/>
           </a:xfrm>
           <a:prstGeom prst="rect">
             <a:avLst/>
@@ -2441,7 +2975,7 @@
                   <a:srgbClr val="4B5563"/>
                 </a:solidFill>
               </a:rPr>
-              <a:t>Iterações até o piso do ruído (uma execução).</a:t>
+              <a:t>Comprimento e direção do passo conforme μ.</a:t>
             </a:r>
             <a:endParaRPr lang="en-US" sz="1400" dirty="0"/>
           </a:p>
@@ -2552,7 +3086,7 @@
                 <a:ea typeface="Calibri" pitchFamily="34" charset="-122"/>
                 <a:cs typeface="Calibri" pitchFamily="34" charset="-120"/>
               </a:rPr>
-              <a:t>O que o livro mediu em digits</a:t>
+              <a:t>LMBP: a Jacobiana de uma rede</a:t>
             </a:r>
             <a:endParaRPr lang="en-US" sz="2600" dirty="0"/>
           </a:p>
@@ -2594,7 +3128,7 @@
                   <a:srgbClr val="1F2937"/>
                 </a:solidFill>
               </a:rPr>
-              <a:t>LM: acurácia 0,87–0,89 em 2,7 a 4,4 s</a:t>
+              <a:t>r = y − t tem Nm componentes; J tem Nm × P</a:t>
             </a:r>
             <a:endParaRPr lang="en-US" sz="2400" dirty="0"/>
           </a:p>
@@ -2612,7 +3146,7 @@
                   <a:srgbClr val="1F2937"/>
                 </a:solidFill>
               </a:rPr>
-              <a:t>iRPROP−: 0,93 em 0,10–0,13 s</a:t>
+              <a:t>Uma retropropagação por saída preenche as linhas</a:t>
             </a:r>
             <a:endParaRPr lang="en-US" sz="2400" dirty="0"/>
           </a:p>
@@ -2630,7 +3164,7 @@
                   <a:srgbClr val="1F2937"/>
                 </a:solidFill>
               </a:rPr>
-              <a:t>lbfgs: 0,91 em 0,05–0,10 s</a:t>
+              <a:t>Memória O(NmP + P²), custo O(P³) por solução</a:t>
             </a:r>
             <a:endParaRPr lang="en-US" sz="2400" dirty="0"/>
           </a:p>
@@ -2648,7 +3182,7 @@
                   <a:srgbClr val="1F2937"/>
                 </a:solidFill>
               </a:rPr>
-              <a:t>Aqui o LM não compensou (25–40× mais lento)</a:t>
+              <a:t>Comparado ao scipy.optimize.least_squares: resultados semelhantes</a:t>
             </a:r>
             <a:endParaRPr lang="en-US" sz="2400" dirty="0"/>
           </a:p>
@@ -2759,85 +3293,46 @@
                 <a:ea typeface="Calibri" pitchFamily="34" charset="-122"/>
                 <a:cs typeface="Calibri" pitchFamily="34" charset="-120"/>
               </a:rPr>
-              <a:t>Atividade</a:t>
+              <a:t>Comparação com os demais</a:t>
             </a:r>
             <a:endParaRPr lang="en-US" sz="2600" dirty="0"/>
           </a:p>
         </p:txBody>
       </p:sp>
-      <p:sp>
-        <p:nvSpPr>
-          <p:cNvPr id="3" name="Shape 1"/>
-          <p:cNvSpPr/>
-          <p:nvPr/>
-        </p:nvSpPr>
-        <p:spPr>
-          <a:xfrm>
-            <a:off x="548640" y="1188720"/>
-            <a:ext cx="8046720" cy="3108960"/>
-          </a:xfrm>
-          <a:prstGeom prst="roundRect">
-            <a:avLst>
-              <a:gd name="adj" fmla="val 3529"/>
-            </a:avLst>
-          </a:prstGeom>
-          <a:solidFill>
-            <a:srgbClr val="FFFBEB"/>
-          </a:solidFill>
-          <a:ln w="25400">
-            <a:solidFill>
-              <a:srgbClr val="F59E0B"/>
-            </a:solidFill>
-            <a:prstDash val="solid"/>
-          </a:ln>
-        </p:spPr>
-      </p:sp>
-      <p:sp>
-        <p:nvSpPr>
-          <p:cNvPr id="4" name="Text 2"/>
+      <p:pic>
+        <p:nvPicPr>
+          <p:cNvPr id="3" name="Image 0" descr="Iterações até o piso do ruído (uma execução).">    </p:cNvPr>
+          <p:cNvPicPr>
+            <a:picLocks noChangeAspect="1"/>
+          </p:cNvPicPr>
+          <p:nvPr/>
+        </p:nvPicPr>
+        <p:blipFill>
+          <a:blip r:embed="rId1"/>
+          <a:stretch>
+            <a:fillRect/>
+          </a:stretch>
+        </p:blipFill>
+        <p:spPr>
+          <a:xfrm>
+            <a:off x="2171787" y="1005840"/>
+            <a:ext cx="4800425" cy="3154680"/>
+          </a:xfrm>
+          <a:prstGeom prst="rect">
+            <a:avLst/>
+          </a:prstGeom>
+        </p:spPr>
+      </p:pic>
+      <p:sp>
+        <p:nvSpPr>
+          <p:cNvPr id="4" name="Text 1"/>
           <p:cNvSpPr txBox="1"/>
           <p:nvPr/>
         </p:nvSpPr>
         <p:spPr>
           <a:xfrm>
-            <a:off x="822960" y="1325880"/>
-            <a:ext cx="3657600" cy="365760"/>
-          </a:xfrm>
-          <a:prstGeom prst="rect">
-            <a:avLst/>
-          </a:prstGeom>
-          <a:noFill/>
-          <a:ln/>
-        </p:spPr>
-        <p:txBody>
-          <a:bodyPr wrap="square" lIns="0" tIns="0" rIns="0" bIns="0" rtlCol="0" anchor="ctr"/>
-          <a:lstStyle/>
-          <a:p>
-            <a:pPr indent="0" marL="0">
-              <a:buNone/>
-            </a:pPr>
-            <a:r>
-              <a:rPr lang="en-US" sz="1400" b="1" spc="300" kern="0" dirty="0">
-                <a:solidFill>
-                  <a:srgbClr val="B45309"/>
-                </a:solidFill>
-              </a:rPr>
-              <a:t>MÃO NA MASSA</a:t>
-            </a:r>
-            <a:endParaRPr lang="en-US" sz="1400" dirty="0"/>
-          </a:p>
-        </p:txBody>
-      </p:sp>
-      <p:sp>
-        <p:nvSpPr>
-          <p:cNvPr id="5" name="Text 3"/>
-          <p:cNvSpPr txBox="1"/>
-          <p:nvPr/>
-        </p:nvSpPr>
-        <p:spPr>
-          <a:xfrm>
-            <a:off x="822960" y="1783080"/>
-            <a:ext cx="7498080" cy="2377440"/>
+            <a:off x="457200" y="4251960"/>
+            <a:ext cx="8229600" cy="457200"/>
           </a:xfrm>
           <a:prstGeom prst="rect">
             <a:avLst/>
@@ -2851,18 +3346,18 @@
           </a:bodyPr>
           <a:lstStyle/>
           <a:p>
-            <a:pPr indent="0" marL="0">
+            <a:pPr algn="ctr" indent="0" marL="0">
               <a:buNone/>
             </a:pPr>
             <a:r>
-              <a:rPr lang="en-US" sz="2100" dirty="0">
-                <a:solidFill>
-                  <a:srgbClr val="1F2937"/>
-                </a:solidFill>
-              </a:rPr>
-              <a:t>Dados J = [[1,0],[0,2],[1,1]] e r = (1, −1, 0,5): calcule g, JᵀJ, o passo de Gauss–Newton e o de LM com μ = 1. Compare as normas.</a:t>
-            </a:r>
-            <a:endParaRPr lang="en-US" sz="2100" dirty="0"/>
+              <a:rPr lang="en-US" sz="1400" i="1" dirty="0">
+                <a:solidFill>
+                  <a:srgbClr val="4B5563"/>
+                </a:solidFill>
+              </a:rPr>
+              <a:t>Iterações até o piso do ruído (uma execução).</a:t>
+            </a:r>
+            <a:endParaRPr lang="en-US" sz="1400" dirty="0"/>
           </a:p>
         </p:txBody>
       </p:sp>
@@ -2944,6 +3439,1468 @@
         </p:nvSpPr>
         <p:spPr>
           <a:xfrm>
+            <a:off x="365760" y="109728"/>
+            <a:ext cx="8412480" cy="658368"/>
+          </a:xfrm>
+          <a:prstGeom prst="rect">
+            <a:avLst/>
+          </a:prstGeom>
+          <a:noFill/>
+          <a:ln/>
+        </p:spPr>
+        <p:txBody>
+          <a:bodyPr wrap="square" lIns="0" tIns="0" rIns="0" bIns="0" rtlCol="0" anchor="ctr">
+            <a:normAutofit/>
+          </a:bodyPr>
+          <a:lstStyle/>
+          <a:p>
+            <a:pPr indent="0" marL="0">
+              <a:buNone/>
+            </a:pPr>
+            <a:r>
+              <a:rPr lang="en-US" sz="2600" b="1" dirty="0">
+                <a:solidFill>
+                  <a:srgbClr val="FFFFFF"/>
+                </a:solidFill>
+                <a:latin typeface="Calibri" pitchFamily="34" charset="0"/>
+                <a:ea typeface="Calibri" pitchFamily="34" charset="-122"/>
+                <a:cs typeface="Calibri" pitchFamily="34" charset="-120"/>
+              </a:rPr>
+              <a:t>O que o livro mediu em digits</a:t>
+            </a:r>
+            <a:endParaRPr lang="en-US" sz="2600" dirty="0"/>
+          </a:p>
+        </p:txBody>
+      </p:sp>
+      <p:sp>
+        <p:nvSpPr>
+          <p:cNvPr id="3" name="Text 1"/>
+          <p:cNvSpPr txBox="1"/>
+          <p:nvPr/>
+        </p:nvSpPr>
+        <p:spPr>
+          <a:xfrm>
+            <a:off x="548640" y="1188720"/>
+            <a:ext cx="8046720" cy="3383280"/>
+          </a:xfrm>
+          <a:prstGeom prst="rect">
+            <a:avLst/>
+          </a:prstGeom>
+          <a:noFill/>
+          <a:ln/>
+        </p:spPr>
+        <p:txBody>
+          <a:bodyPr wrap="square" lIns="0" tIns="0" rIns="0" bIns="0" rtlCol="0" anchor="t">
+            <a:normAutofit/>
+          </a:bodyPr>
+          <a:lstStyle/>
+          <a:p>
+            <a:pPr marL="342900" indent="-342900">
+              <a:spcAft>
+                <a:spcPts val="1400"/>
+              </a:spcAft>
+              <a:buSzPct val="100000"/>
+              <a:buChar char="•"/>
+            </a:pPr>
+            <a:r>
+              <a:rPr lang="en-US" sz="2400" dirty="0">
+                <a:solidFill>
+                  <a:srgbClr val="1F2937"/>
+                </a:solidFill>
+              </a:rPr>
+              <a:t>LM: acurácia 0,87–0,89 em 2,7 a 4,4 s</a:t>
+            </a:r>
+            <a:endParaRPr lang="en-US" sz="2400" dirty="0"/>
+          </a:p>
+          <a:p>
+            <a:pPr marL="342900" indent="-342900">
+              <a:spcAft>
+                <a:spcPts val="1400"/>
+              </a:spcAft>
+              <a:buSzPct val="100000"/>
+              <a:buChar char="•"/>
+            </a:pPr>
+            <a:r>
+              <a:rPr lang="en-US" sz="2400" dirty="0">
+                <a:solidFill>
+                  <a:srgbClr val="1F2937"/>
+                </a:solidFill>
+              </a:rPr>
+              <a:t>iRPROP−: 0,93 em 0,10–0,13 s</a:t>
+            </a:r>
+            <a:endParaRPr lang="en-US" sz="2400" dirty="0"/>
+          </a:p>
+          <a:p>
+            <a:pPr marL="342900" indent="-342900">
+              <a:spcAft>
+                <a:spcPts val="1400"/>
+              </a:spcAft>
+              <a:buSzPct val="100000"/>
+              <a:buChar char="•"/>
+            </a:pPr>
+            <a:r>
+              <a:rPr lang="en-US" sz="2400" dirty="0">
+                <a:solidFill>
+                  <a:srgbClr val="1F2937"/>
+                </a:solidFill>
+              </a:rPr>
+              <a:t>lbfgs: 0,91 em 0,05–0,10 s</a:t>
+            </a:r>
+            <a:endParaRPr lang="en-US" sz="2400" dirty="0"/>
+          </a:p>
+          <a:p>
+            <a:pPr marL="342900" indent="-342900">
+              <a:spcAft>
+                <a:spcPts val="1400"/>
+              </a:spcAft>
+              <a:buSzPct val="100000"/>
+              <a:buChar char="•"/>
+            </a:pPr>
+            <a:r>
+              <a:rPr lang="en-US" sz="2400" dirty="0">
+                <a:solidFill>
+                  <a:srgbClr val="1F2937"/>
+                </a:solidFill>
+              </a:rPr>
+              <a:t>Aqui o LM não compensou (25–40× mais lento)</a:t>
+            </a:r>
+            <a:endParaRPr lang="en-US" sz="2400" dirty="0"/>
+          </a:p>
+        </p:txBody>
+      </p:sp>
+      <p:sp>
+        <p:nvSpPr>
+          <p:cNvPr id="25" name="Slide Number Placeholder 0"/>
+          <p:cNvSpPr>
+            <a:spLocks noGrp="1"/>
+          </p:cNvSpPr>
+          <p:nvPr>
+            <p:ph type="sldNum" sz="quarter" idx="4294967295"/>
+          </p:nvPr>
+        </p:nvSpPr>
+        <p:spPr>
+          <a:xfrm>
+            <a:off x="8412480" y="4828032"/>
+            <a:ext cx="457200" cy="228600"/>
+          </a:xfrm>
+          <a:prstGeom prst="rect">
+            <a:avLst/>
+          </a:prstGeom>
+          <a:extLst>
+            <a:ext uri="{C572A759-6A51-4108-AA02-DFA0A04FC94B}">
+              <ma14:wrappingTextBoxFlag xmlns:ma14="http://schemas.microsoft.com/office/mac/drawingml/2011/main" val="0"/>
+            </a:ext>
+          </a:extLst>
+        </p:spPr>
+        <p:txBody>
+          <a:bodyPr/>
+          <a:lstStyle>
+            <a:lvl1pPr>
+              <a:defRPr sz="900">
+                <a:solidFill>
+                  <a:srgbClr val="6B7280"/>
+                </a:solidFill>
+              </a:defRPr>
+            </a:lvl1pPr>
+          </a:lstStyle>
+          <a:p>
+            <a:pPr algn="l"/>
+            <a:fld id="{F7021451-1387-4CA6-816F-3879F97B5CBC}" type="slidenum">
+              <a:rPr b="0" lang="en-US"/>
+              <a:t>13</a:t>
+            </a:fld>
+            <a:endParaRPr lang="en-US"/>
+          </a:p>
+        </p:txBody>
+      </p:sp>
+    </p:spTree>
+  </p:cSld>
+  <p:clrMapOvr>
+    <a:masterClrMapping/>
+  </p:clrMapOvr>
+</p:sld>
+</file>
+
+<file path=ppt/slides/slide14.xml><?xml version="1.0" encoding="utf-8"?>
+<p:sld xmlns:a="http://schemas.openxmlformats.org/drawingml/2006/main" xmlns:r="http://schemas.openxmlformats.org/officeDocument/2006/relationships" xmlns:p="http://schemas.openxmlformats.org/presentationml/2006/main">
+  <p:cSld name="Slide 14">
+    <p:spTree>
+      <p:nvGrpSpPr>
+        <p:cNvPr id="1" name=""/>
+        <p:cNvGrpSpPr/>
+        <p:nvPr/>
+      </p:nvGrpSpPr>
+      <p:grpSpPr>
+        <a:xfrm>
+          <a:off x="0" y="0"/>
+          <a:ext cx="0" cy="0"/>
+          <a:chOff x="0" y="0"/>
+          <a:chExt cx="0" cy="0"/>
+        </a:xfrm>
+      </p:grpSpPr>
+      <p:sp>
+        <p:nvSpPr>
+          <p:cNvPr id="2" name="Text 0"/>
+          <p:cNvSpPr txBox="1"/>
+          <p:nvPr/>
+        </p:nvSpPr>
+        <p:spPr>
+          <a:xfrm>
+            <a:off x="365760" y="109728"/>
+            <a:ext cx="8412480" cy="658368"/>
+          </a:xfrm>
+          <a:prstGeom prst="rect">
+            <a:avLst/>
+          </a:prstGeom>
+          <a:noFill/>
+          <a:ln/>
+        </p:spPr>
+        <p:txBody>
+          <a:bodyPr wrap="square" lIns="0" tIns="0" rIns="0" bIns="0" rtlCol="0" anchor="ctr">
+            <a:normAutofit/>
+          </a:bodyPr>
+          <a:lstStyle/>
+          <a:p>
+            <a:pPr indent="0" marL="0">
+              <a:buNone/>
+            </a:pPr>
+            <a:r>
+              <a:rPr lang="en-US" sz="2600" b="1" dirty="0">
+                <a:solidFill>
+                  <a:srgbClr val="FFFFFF"/>
+                </a:solidFill>
+                <a:latin typeface="Calibri" pitchFamily="34" charset="0"/>
+                <a:ea typeface="Calibri" pitchFamily="34" charset="-122"/>
+                <a:cs typeface="Calibri" pitchFamily="34" charset="-120"/>
+              </a:rPr>
+              <a:t>Quanto custa o LM</a:t>
+            </a:r>
+            <a:endParaRPr lang="en-US" sz="2600" dirty="0"/>
+          </a:p>
+        </p:txBody>
+      </p:sp>
+      <p:sp>
+        <p:nvSpPr>
+          <p:cNvPr id="3" name="Text 1"/>
+          <p:cNvSpPr txBox="1"/>
+          <p:nvPr/>
+        </p:nvSpPr>
+        <p:spPr>
+          <a:xfrm>
+            <a:off x="548640" y="1188720"/>
+            <a:ext cx="8046720" cy="3383280"/>
+          </a:xfrm>
+          <a:prstGeom prst="rect">
+            <a:avLst/>
+          </a:prstGeom>
+          <a:noFill/>
+          <a:ln/>
+        </p:spPr>
+        <p:txBody>
+          <a:bodyPr wrap="square" lIns="0" tIns="0" rIns="0" bIns="0" rtlCol="0" anchor="t">
+            <a:normAutofit/>
+          </a:bodyPr>
+          <a:lstStyle/>
+          <a:p>
+            <a:pPr marL="342900" indent="-342900">
+              <a:spcAft>
+                <a:spcPts val="1400"/>
+              </a:spcAft>
+              <a:buSzPct val="100000"/>
+              <a:buChar char="•"/>
+            </a:pPr>
+            <a:r>
+              <a:rPr lang="en-US" sz="2400" dirty="0">
+                <a:solidFill>
+                  <a:srgbClr val="1F2937"/>
+                </a:solidFill>
+              </a:rPr>
+              <a:t>Jacobiana J: (N·m) × P elementos</a:t>
+            </a:r>
+            <a:endParaRPr lang="en-US" sz="2400" dirty="0"/>
+          </a:p>
+          <a:p>
+            <a:pPr marL="342900" indent="-342900">
+              <a:spcAft>
+                <a:spcPts val="1400"/>
+              </a:spcAft>
+              <a:buSzPct val="100000"/>
+              <a:buChar char="•"/>
+            </a:pPr>
+            <a:r>
+              <a:rPr lang="en-US" sz="2400" dirty="0">
+                <a:solidFill>
+                  <a:srgbClr val="1F2937"/>
+                </a:solidFill>
+              </a:rPr>
+              <a:t>JᵀJ: P × P, memória O(P²)</a:t>
+            </a:r>
+            <a:endParaRPr lang="en-US" sz="2400" dirty="0"/>
+          </a:p>
+          <a:p>
+            <a:pPr marL="342900" indent="-342900">
+              <a:spcAft>
+                <a:spcPts val="1400"/>
+              </a:spcAft>
+              <a:buSzPct val="100000"/>
+              <a:buChar char="•"/>
+            </a:pPr>
+            <a:r>
+              <a:rPr lang="en-US" sz="2400" dirty="0">
+                <a:solidFill>
+                  <a:srgbClr val="1F2937"/>
+                </a:solidFill>
+              </a:rPr>
+              <a:t>Resolver o sistema: O(P³)</a:t>
+            </a:r>
+            <a:endParaRPr lang="en-US" sz="2400" dirty="0"/>
+          </a:p>
+          <a:p>
+            <a:pPr marL="342900" indent="-342900">
+              <a:spcAft>
+                <a:spcPts val="1400"/>
+              </a:spcAft>
+              <a:buSzPct val="100000"/>
+              <a:buChar char="•"/>
+            </a:pPr>
+            <a:r>
+              <a:rPr lang="en-US" sz="2400" dirty="0">
+                <a:solidFill>
+                  <a:srgbClr val="1F2937"/>
+                </a:solidFill>
+              </a:rPr>
+              <a:t>P = 10⁴ → JᵀJ ocupa cerca de 800 MB</a:t>
+            </a:r>
+            <a:endParaRPr lang="en-US" sz="2400" dirty="0"/>
+          </a:p>
+          <a:p>
+            <a:pPr marL="342900" indent="-342900">
+              <a:spcAft>
+                <a:spcPts val="1400"/>
+              </a:spcAft>
+              <a:buSzPct val="100000"/>
+              <a:buChar char="•"/>
+            </a:pPr>
+            <a:r>
+              <a:rPr lang="en-US" sz="2400" dirty="0">
+                <a:solidFill>
+                  <a:srgbClr val="1F2937"/>
+                </a:solidFill>
+              </a:rPr>
+              <a:t>Por isso: ótimo em redes pequenas, inviável em grandes</a:t>
+            </a:r>
+            <a:endParaRPr lang="en-US" sz="2400" dirty="0"/>
+          </a:p>
+        </p:txBody>
+      </p:sp>
+      <p:sp>
+        <p:nvSpPr>
+          <p:cNvPr id="25" name="Slide Number Placeholder 0"/>
+          <p:cNvSpPr>
+            <a:spLocks noGrp="1"/>
+          </p:cNvSpPr>
+          <p:nvPr>
+            <p:ph type="sldNum" sz="quarter" idx="4294967295"/>
+          </p:nvPr>
+        </p:nvSpPr>
+        <p:spPr>
+          <a:xfrm>
+            <a:off x="8412480" y="4828032"/>
+            <a:ext cx="457200" cy="228600"/>
+          </a:xfrm>
+          <a:prstGeom prst="rect">
+            <a:avLst/>
+          </a:prstGeom>
+          <a:extLst>
+            <a:ext uri="{C572A759-6A51-4108-AA02-DFA0A04FC94B}">
+              <ma14:wrappingTextBoxFlag xmlns:ma14="http://schemas.microsoft.com/office/mac/drawingml/2011/main" val="0"/>
+            </a:ext>
+          </a:extLst>
+        </p:spPr>
+        <p:txBody>
+          <a:bodyPr/>
+          <a:lstStyle>
+            <a:lvl1pPr>
+              <a:defRPr sz="900">
+                <a:solidFill>
+                  <a:srgbClr val="6B7280"/>
+                </a:solidFill>
+              </a:defRPr>
+            </a:lvl1pPr>
+          </a:lstStyle>
+          <a:p>
+            <a:pPr algn="l"/>
+            <a:fld id="{F7021451-1387-4CA6-816F-3879F97B5CBC}" type="slidenum">
+              <a:rPr b="0" lang="en-US"/>
+              <a:t>14</a:t>
+            </a:fld>
+            <a:endParaRPr lang="en-US"/>
+          </a:p>
+        </p:txBody>
+      </p:sp>
+    </p:spTree>
+  </p:cSld>
+  <p:clrMapOvr>
+    <a:masterClrMapping/>
+  </p:clrMapOvr>
+</p:sld>
+</file>
+
+<file path=ppt/slides/slide15.xml><?xml version="1.0" encoding="utf-8"?>
+<p:sld xmlns:a="http://schemas.openxmlformats.org/drawingml/2006/main" xmlns:r="http://schemas.openxmlformats.org/officeDocument/2006/relationships" xmlns:p="http://schemas.openxmlformats.org/presentationml/2006/main">
+  <p:cSld name="Slide 15">
+    <p:spTree>
+      <p:nvGrpSpPr>
+        <p:cNvPr id="1" name=""/>
+        <p:cNvGrpSpPr/>
+        <p:nvPr/>
+      </p:nvGrpSpPr>
+      <p:grpSpPr>
+        <a:xfrm>
+          <a:off x="0" y="0"/>
+          <a:ext cx="0" cy="0"/>
+          <a:chOff x="0" y="0"/>
+          <a:chExt cx="0" cy="0"/>
+        </a:xfrm>
+      </p:grpSpPr>
+      <p:sp>
+        <p:nvSpPr>
+          <p:cNvPr id="2" name="Text 0"/>
+          <p:cNvSpPr txBox="1"/>
+          <p:nvPr/>
+        </p:nvSpPr>
+        <p:spPr>
+          <a:xfrm>
+            <a:off x="365760" y="109728"/>
+            <a:ext cx="8412480" cy="658368"/>
+          </a:xfrm>
+          <a:prstGeom prst="rect">
+            <a:avLst/>
+          </a:prstGeom>
+          <a:noFill/>
+          <a:ln/>
+        </p:spPr>
+        <p:txBody>
+          <a:bodyPr wrap="square" lIns="0" tIns="0" rIns="0" bIns="0" rtlCol="0" anchor="ctr">
+            <a:normAutofit/>
+          </a:bodyPr>
+          <a:lstStyle/>
+          <a:p>
+            <a:pPr indent="0" marL="0">
+              <a:buNone/>
+            </a:pPr>
+            <a:r>
+              <a:rPr lang="en-US" sz="2600" b="1" dirty="0">
+                <a:solidFill>
+                  <a:srgbClr val="FFFFFF"/>
+                </a:solidFill>
+                <a:latin typeface="Calibri" pitchFamily="34" charset="0"/>
+                <a:ea typeface="Calibri" pitchFamily="34" charset="-122"/>
+                <a:cs typeface="Calibri" pitchFamily="34" charset="-120"/>
+              </a:rPr>
+              <a:t>Quiz relâmpago 1</a:t>
+            </a:r>
+            <a:endParaRPr lang="en-US" sz="2600" dirty="0"/>
+          </a:p>
+        </p:txBody>
+      </p:sp>
+      <p:sp>
+        <p:nvSpPr>
+          <p:cNvPr id="3" name="Text 1"/>
+          <p:cNvSpPr txBox="1"/>
+          <p:nvPr/>
+        </p:nvSpPr>
+        <p:spPr>
+          <a:xfrm>
+            <a:off x="548640" y="1051560"/>
+            <a:ext cx="8046720" cy="822960"/>
+          </a:xfrm>
+          <a:prstGeom prst="rect">
+            <a:avLst/>
+          </a:prstGeom>
+          <a:noFill/>
+          <a:ln/>
+        </p:spPr>
+        <p:txBody>
+          <a:bodyPr wrap="square" lIns="0" tIns="0" rIns="0" bIns="0" rtlCol="0" anchor="ctr">
+            <a:normAutofit/>
+          </a:bodyPr>
+          <a:lstStyle/>
+          <a:p>
+            <a:pPr indent="0" marL="0">
+              <a:buNone/>
+            </a:pPr>
+            <a:r>
+              <a:rPr lang="en-US" sz="2200" b="1" dirty="0">
+                <a:solidFill>
+                  <a:srgbClr val="312E81"/>
+                </a:solidFill>
+              </a:rPr>
+              <a:t>A matriz JᵀJ + μI, com μ &gt; 0, é:</a:t>
+            </a:r>
+            <a:endParaRPr lang="en-US" sz="2200" dirty="0"/>
+          </a:p>
+        </p:txBody>
+      </p:sp>
+      <p:sp>
+        <p:nvSpPr>
+          <p:cNvPr id="4" name="Shape 2"/>
+          <p:cNvSpPr/>
+          <p:nvPr/>
+        </p:nvSpPr>
+        <p:spPr>
+          <a:xfrm>
+            <a:off x="548640" y="1965960"/>
+            <a:ext cx="8046720" cy="548640"/>
+          </a:xfrm>
+          <a:prstGeom prst="roundRect">
+            <a:avLst>
+              <a:gd name="adj" fmla="val 13333"/>
+            </a:avLst>
+          </a:prstGeom>
+          <a:solidFill>
+            <a:srgbClr val="EEF2FF"/>
+          </a:solidFill>
+          <a:ln w="12700">
+            <a:solidFill>
+              <a:srgbClr val="C7D2FE"/>
+            </a:solidFill>
+            <a:prstDash val="solid"/>
+          </a:ln>
+        </p:spPr>
+      </p:sp>
+      <p:sp>
+        <p:nvSpPr>
+          <p:cNvPr id="5" name="Text 3"/>
+          <p:cNvSpPr txBox="1"/>
+          <p:nvPr/>
+        </p:nvSpPr>
+        <p:spPr>
+          <a:xfrm>
+            <a:off x="777240" y="1965960"/>
+            <a:ext cx="7680960" cy="548640"/>
+          </a:xfrm>
+          <a:prstGeom prst="rect">
+            <a:avLst/>
+          </a:prstGeom>
+          <a:noFill/>
+          <a:ln/>
+        </p:spPr>
+        <p:txBody>
+          <a:bodyPr wrap="square" lIns="0" tIns="0" rIns="0" bIns="0" rtlCol="0" anchor="ctr">
+            <a:normAutofit/>
+          </a:bodyPr>
+          <a:lstStyle/>
+          <a:p>
+            <a:pPr indent="0" marL="0">
+              <a:buNone/>
+            </a:pPr>
+            <a:r>
+              <a:rPr lang="en-US" sz="1800" dirty="0">
+                <a:solidFill>
+                  <a:srgbClr val="1F2937"/>
+                </a:solidFill>
+              </a:rPr>
+              <a:t>A)  Definida positiva</a:t>
+            </a:r>
+            <a:endParaRPr lang="en-US" sz="1800" dirty="0"/>
+          </a:p>
+        </p:txBody>
+      </p:sp>
+      <p:sp>
+        <p:nvSpPr>
+          <p:cNvPr id="6" name="Shape 4"/>
+          <p:cNvSpPr/>
+          <p:nvPr/>
+        </p:nvSpPr>
+        <p:spPr>
+          <a:xfrm>
+            <a:off x="548640" y="2606040"/>
+            <a:ext cx="8046720" cy="548640"/>
+          </a:xfrm>
+          <a:prstGeom prst="roundRect">
+            <a:avLst>
+              <a:gd name="adj" fmla="val 13333"/>
+            </a:avLst>
+          </a:prstGeom>
+          <a:solidFill>
+            <a:srgbClr val="EEF2FF"/>
+          </a:solidFill>
+          <a:ln w="12700">
+            <a:solidFill>
+              <a:srgbClr val="C7D2FE"/>
+            </a:solidFill>
+            <a:prstDash val="solid"/>
+          </a:ln>
+        </p:spPr>
+      </p:sp>
+      <p:sp>
+        <p:nvSpPr>
+          <p:cNvPr id="7" name="Text 5"/>
+          <p:cNvSpPr txBox="1"/>
+          <p:nvPr/>
+        </p:nvSpPr>
+        <p:spPr>
+          <a:xfrm>
+            <a:off x="777240" y="2606040"/>
+            <a:ext cx="7680960" cy="548640"/>
+          </a:xfrm>
+          <a:prstGeom prst="rect">
+            <a:avLst/>
+          </a:prstGeom>
+          <a:noFill/>
+          <a:ln/>
+        </p:spPr>
+        <p:txBody>
+          <a:bodyPr wrap="square" lIns="0" tIns="0" rIns="0" bIns="0" rtlCol="0" anchor="ctr">
+            <a:normAutofit/>
+          </a:bodyPr>
+          <a:lstStyle/>
+          <a:p>
+            <a:pPr indent="0" marL="0">
+              <a:buNone/>
+            </a:pPr>
+            <a:r>
+              <a:rPr lang="en-US" sz="1800" dirty="0">
+                <a:solidFill>
+                  <a:srgbClr val="1F2937"/>
+                </a:solidFill>
+              </a:rPr>
+              <a:t>B)  Sempre singular</a:t>
+            </a:r>
+            <a:endParaRPr lang="en-US" sz="1800" dirty="0"/>
+          </a:p>
+        </p:txBody>
+      </p:sp>
+      <p:sp>
+        <p:nvSpPr>
+          <p:cNvPr id="8" name="Shape 6"/>
+          <p:cNvSpPr/>
+          <p:nvPr/>
+        </p:nvSpPr>
+        <p:spPr>
+          <a:xfrm>
+            <a:off x="548640" y="3246120"/>
+            <a:ext cx="8046720" cy="548640"/>
+          </a:xfrm>
+          <a:prstGeom prst="roundRect">
+            <a:avLst>
+              <a:gd name="adj" fmla="val 13333"/>
+            </a:avLst>
+          </a:prstGeom>
+          <a:solidFill>
+            <a:srgbClr val="EEF2FF"/>
+          </a:solidFill>
+          <a:ln w="12700">
+            <a:solidFill>
+              <a:srgbClr val="C7D2FE"/>
+            </a:solidFill>
+            <a:prstDash val="solid"/>
+          </a:ln>
+        </p:spPr>
+      </p:sp>
+      <p:sp>
+        <p:nvSpPr>
+          <p:cNvPr id="9" name="Text 7"/>
+          <p:cNvSpPr txBox="1"/>
+          <p:nvPr/>
+        </p:nvSpPr>
+        <p:spPr>
+          <a:xfrm>
+            <a:off x="777240" y="3246120"/>
+            <a:ext cx="7680960" cy="548640"/>
+          </a:xfrm>
+          <a:prstGeom prst="rect">
+            <a:avLst/>
+          </a:prstGeom>
+          <a:noFill/>
+          <a:ln/>
+        </p:spPr>
+        <p:txBody>
+          <a:bodyPr wrap="square" lIns="0" tIns="0" rIns="0" bIns="0" rtlCol="0" anchor="ctr">
+            <a:normAutofit/>
+          </a:bodyPr>
+          <a:lstStyle/>
+          <a:p>
+            <a:pPr indent="0" marL="0">
+              <a:buNone/>
+            </a:pPr>
+            <a:r>
+              <a:rPr lang="en-US" sz="1800" dirty="0">
+                <a:solidFill>
+                  <a:srgbClr val="1F2937"/>
+                </a:solidFill>
+              </a:rPr>
+              <a:t>C)  Antissimétrica</a:t>
+            </a:r>
+            <a:endParaRPr lang="en-US" sz="1800" dirty="0"/>
+          </a:p>
+        </p:txBody>
+      </p:sp>
+      <p:sp>
+        <p:nvSpPr>
+          <p:cNvPr id="10" name="Shape 8"/>
+          <p:cNvSpPr/>
+          <p:nvPr/>
+        </p:nvSpPr>
+        <p:spPr>
+          <a:xfrm>
+            <a:off x="548640" y="3886200"/>
+            <a:ext cx="8046720" cy="548640"/>
+          </a:xfrm>
+          <a:prstGeom prst="roundRect">
+            <a:avLst>
+              <a:gd name="adj" fmla="val 13333"/>
+            </a:avLst>
+          </a:prstGeom>
+          <a:solidFill>
+            <a:srgbClr val="EEF2FF"/>
+          </a:solidFill>
+          <a:ln w="12700">
+            <a:solidFill>
+              <a:srgbClr val="C7D2FE"/>
+            </a:solidFill>
+            <a:prstDash val="solid"/>
+          </a:ln>
+        </p:spPr>
+      </p:sp>
+      <p:sp>
+        <p:nvSpPr>
+          <p:cNvPr id="11" name="Text 9"/>
+          <p:cNvSpPr txBox="1"/>
+          <p:nvPr/>
+        </p:nvSpPr>
+        <p:spPr>
+          <a:xfrm>
+            <a:off x="777240" y="3886200"/>
+            <a:ext cx="7680960" cy="548640"/>
+          </a:xfrm>
+          <a:prstGeom prst="rect">
+            <a:avLst/>
+          </a:prstGeom>
+          <a:noFill/>
+          <a:ln/>
+        </p:spPr>
+        <p:txBody>
+          <a:bodyPr wrap="square" lIns="0" tIns="0" rIns="0" bIns="0" rtlCol="0" anchor="ctr">
+            <a:normAutofit/>
+          </a:bodyPr>
+          <a:lstStyle/>
+          <a:p>
+            <a:pPr indent="0" marL="0">
+              <a:buNone/>
+            </a:pPr>
+            <a:r>
+              <a:rPr lang="en-US" sz="1800" dirty="0">
+                <a:solidFill>
+                  <a:srgbClr val="1F2937"/>
+                </a:solidFill>
+              </a:rPr>
+              <a:t>D)  Nula</a:t>
+            </a:r>
+            <a:endParaRPr lang="en-US" sz="1800" dirty="0"/>
+          </a:p>
+        </p:txBody>
+      </p:sp>
+      <p:sp>
+        <p:nvSpPr>
+          <p:cNvPr id="25" name="Slide Number Placeholder 0"/>
+          <p:cNvSpPr>
+            <a:spLocks noGrp="1"/>
+          </p:cNvSpPr>
+          <p:nvPr>
+            <p:ph type="sldNum" sz="quarter" idx="4294967295"/>
+          </p:nvPr>
+        </p:nvSpPr>
+        <p:spPr>
+          <a:xfrm>
+            <a:off x="8412480" y="4828032"/>
+            <a:ext cx="457200" cy="228600"/>
+          </a:xfrm>
+          <a:prstGeom prst="rect">
+            <a:avLst/>
+          </a:prstGeom>
+          <a:extLst>
+            <a:ext uri="{C572A759-6A51-4108-AA02-DFA0A04FC94B}">
+              <ma14:wrappingTextBoxFlag xmlns:ma14="http://schemas.microsoft.com/office/mac/drawingml/2011/main" val="0"/>
+            </a:ext>
+          </a:extLst>
+        </p:spPr>
+        <p:txBody>
+          <a:bodyPr/>
+          <a:lstStyle>
+            <a:lvl1pPr>
+              <a:defRPr sz="900">
+                <a:solidFill>
+                  <a:srgbClr val="6B7280"/>
+                </a:solidFill>
+              </a:defRPr>
+            </a:lvl1pPr>
+          </a:lstStyle>
+          <a:p>
+            <a:pPr algn="l"/>
+            <a:fld id="{F7021451-1387-4CA6-816F-3879F97B5CBC}" type="slidenum">
+              <a:rPr b="0" lang="en-US"/>
+              <a:t>15</a:t>
+            </a:fld>
+            <a:endParaRPr lang="en-US"/>
+          </a:p>
+        </p:txBody>
+      </p:sp>
+    </p:spTree>
+  </p:cSld>
+  <p:clrMapOvr>
+    <a:masterClrMapping/>
+  </p:clrMapOvr>
+</p:sld>
+</file>
+
+<file path=ppt/slides/slide16.xml><?xml version="1.0" encoding="utf-8"?>
+<p:sld xmlns:a="http://schemas.openxmlformats.org/drawingml/2006/main" xmlns:r="http://schemas.openxmlformats.org/officeDocument/2006/relationships" xmlns:p="http://schemas.openxmlformats.org/presentationml/2006/main">
+  <p:cSld name="Slide 16">
+    <p:spTree>
+      <p:nvGrpSpPr>
+        <p:cNvPr id="1" name=""/>
+        <p:cNvGrpSpPr/>
+        <p:nvPr/>
+      </p:nvGrpSpPr>
+      <p:grpSpPr>
+        <a:xfrm>
+          <a:off x="0" y="0"/>
+          <a:ext cx="0" cy="0"/>
+          <a:chOff x="0" y="0"/>
+          <a:chExt cx="0" cy="0"/>
+        </a:xfrm>
+      </p:grpSpPr>
+      <p:sp>
+        <p:nvSpPr>
+          <p:cNvPr id="2" name="Text 0"/>
+          <p:cNvSpPr txBox="1"/>
+          <p:nvPr/>
+        </p:nvSpPr>
+        <p:spPr>
+          <a:xfrm>
+            <a:off x="365760" y="109728"/>
+            <a:ext cx="8412480" cy="658368"/>
+          </a:xfrm>
+          <a:prstGeom prst="rect">
+            <a:avLst/>
+          </a:prstGeom>
+          <a:noFill/>
+          <a:ln/>
+        </p:spPr>
+        <p:txBody>
+          <a:bodyPr wrap="square" lIns="0" tIns="0" rIns="0" bIns="0" rtlCol="0" anchor="ctr">
+            <a:normAutofit/>
+          </a:bodyPr>
+          <a:lstStyle/>
+          <a:p>
+            <a:pPr indent="0" marL="0">
+              <a:buNone/>
+            </a:pPr>
+            <a:r>
+              <a:rPr lang="en-US" sz="2600" b="1" dirty="0">
+                <a:solidFill>
+                  <a:srgbClr val="FFFFFF"/>
+                </a:solidFill>
+                <a:latin typeface="Calibri" pitchFamily="34" charset="0"/>
+                <a:ea typeface="Calibri" pitchFamily="34" charset="-122"/>
+                <a:cs typeface="Calibri" pitchFamily="34" charset="-120"/>
+              </a:rPr>
+              <a:t>Quiz relâmpago 2</a:t>
+            </a:r>
+            <a:endParaRPr lang="en-US" sz="2600" dirty="0"/>
+          </a:p>
+        </p:txBody>
+      </p:sp>
+      <p:sp>
+        <p:nvSpPr>
+          <p:cNvPr id="3" name="Text 1"/>
+          <p:cNvSpPr txBox="1"/>
+          <p:nvPr/>
+        </p:nvSpPr>
+        <p:spPr>
+          <a:xfrm>
+            <a:off x="548640" y="1051560"/>
+            <a:ext cx="8046720" cy="822960"/>
+          </a:xfrm>
+          <a:prstGeom prst="rect">
+            <a:avLst/>
+          </a:prstGeom>
+          <a:noFill/>
+          <a:ln/>
+        </p:spPr>
+        <p:txBody>
+          <a:bodyPr wrap="square" lIns="0" tIns="0" rIns="0" bIns="0" rtlCol="0" anchor="ctr">
+            <a:normAutofit/>
+          </a:bodyPr>
+          <a:lstStyle/>
+          <a:p>
+            <a:pPr indent="0" marL="0">
+              <a:buNone/>
+            </a:pPr>
+            <a:r>
+              <a:rPr lang="en-US" sz="2200" b="1" dirty="0">
+                <a:solidFill>
+                  <a:srgbClr val="312E81"/>
+                </a:solidFill>
+              </a:rPr>
+              <a:t>O LM só se aplica a perdas na forma de:</a:t>
+            </a:r>
+            <a:endParaRPr lang="en-US" sz="2200" dirty="0"/>
+          </a:p>
+        </p:txBody>
+      </p:sp>
+      <p:sp>
+        <p:nvSpPr>
+          <p:cNvPr id="4" name="Shape 2"/>
+          <p:cNvSpPr/>
+          <p:nvPr/>
+        </p:nvSpPr>
+        <p:spPr>
+          <a:xfrm>
+            <a:off x="548640" y="1965960"/>
+            <a:ext cx="8046720" cy="548640"/>
+          </a:xfrm>
+          <a:prstGeom prst="roundRect">
+            <a:avLst>
+              <a:gd name="adj" fmla="val 13333"/>
+            </a:avLst>
+          </a:prstGeom>
+          <a:solidFill>
+            <a:srgbClr val="EEF2FF"/>
+          </a:solidFill>
+          <a:ln w="12700">
+            <a:solidFill>
+              <a:srgbClr val="C7D2FE"/>
+            </a:solidFill>
+            <a:prstDash val="solid"/>
+          </a:ln>
+        </p:spPr>
+      </p:sp>
+      <p:sp>
+        <p:nvSpPr>
+          <p:cNvPr id="5" name="Text 3"/>
+          <p:cNvSpPr txBox="1"/>
+          <p:nvPr/>
+        </p:nvSpPr>
+        <p:spPr>
+          <a:xfrm>
+            <a:off x="777240" y="1965960"/>
+            <a:ext cx="7680960" cy="548640"/>
+          </a:xfrm>
+          <a:prstGeom prst="rect">
+            <a:avLst/>
+          </a:prstGeom>
+          <a:noFill/>
+          <a:ln/>
+        </p:spPr>
+        <p:txBody>
+          <a:bodyPr wrap="square" lIns="0" tIns="0" rIns="0" bIns="0" rtlCol="0" anchor="ctr">
+            <a:normAutofit/>
+          </a:bodyPr>
+          <a:lstStyle/>
+          <a:p>
+            <a:pPr indent="0" marL="0">
+              <a:buNone/>
+            </a:pPr>
+            <a:r>
+              <a:rPr lang="en-US" sz="1800" dirty="0">
+                <a:solidFill>
+                  <a:srgbClr val="1F2937"/>
+                </a:solidFill>
+              </a:rPr>
+              <a:t>A)  Soma de quadrados</a:t>
+            </a:r>
+            <a:endParaRPr lang="en-US" sz="1800" dirty="0"/>
+          </a:p>
+        </p:txBody>
+      </p:sp>
+      <p:sp>
+        <p:nvSpPr>
+          <p:cNvPr id="6" name="Shape 4"/>
+          <p:cNvSpPr/>
+          <p:nvPr/>
+        </p:nvSpPr>
+        <p:spPr>
+          <a:xfrm>
+            <a:off x="548640" y="2606040"/>
+            <a:ext cx="8046720" cy="548640"/>
+          </a:xfrm>
+          <a:prstGeom prst="roundRect">
+            <a:avLst>
+              <a:gd name="adj" fmla="val 13333"/>
+            </a:avLst>
+          </a:prstGeom>
+          <a:solidFill>
+            <a:srgbClr val="EEF2FF"/>
+          </a:solidFill>
+          <a:ln w="12700">
+            <a:solidFill>
+              <a:srgbClr val="C7D2FE"/>
+            </a:solidFill>
+            <a:prstDash val="solid"/>
+          </a:ln>
+        </p:spPr>
+      </p:sp>
+      <p:sp>
+        <p:nvSpPr>
+          <p:cNvPr id="7" name="Text 5"/>
+          <p:cNvSpPr txBox="1"/>
+          <p:nvPr/>
+        </p:nvSpPr>
+        <p:spPr>
+          <a:xfrm>
+            <a:off x="777240" y="2606040"/>
+            <a:ext cx="7680960" cy="548640"/>
+          </a:xfrm>
+          <a:prstGeom prst="rect">
+            <a:avLst/>
+          </a:prstGeom>
+          <a:noFill/>
+          <a:ln/>
+        </p:spPr>
+        <p:txBody>
+          <a:bodyPr wrap="square" lIns="0" tIns="0" rIns="0" bIns="0" rtlCol="0" anchor="ctr">
+            <a:normAutofit/>
+          </a:bodyPr>
+          <a:lstStyle/>
+          <a:p>
+            <a:pPr indent="0" marL="0">
+              <a:buNone/>
+            </a:pPr>
+            <a:r>
+              <a:rPr lang="en-US" sz="1800" dirty="0">
+                <a:solidFill>
+                  <a:srgbClr val="1F2937"/>
+                </a:solidFill>
+              </a:rPr>
+              <a:t>B)  Entropia cruzada apenas</a:t>
+            </a:r>
+            <a:endParaRPr lang="en-US" sz="1800" dirty="0"/>
+          </a:p>
+        </p:txBody>
+      </p:sp>
+      <p:sp>
+        <p:nvSpPr>
+          <p:cNvPr id="8" name="Shape 6"/>
+          <p:cNvSpPr/>
+          <p:nvPr/>
+        </p:nvSpPr>
+        <p:spPr>
+          <a:xfrm>
+            <a:off x="548640" y="3246120"/>
+            <a:ext cx="8046720" cy="548640"/>
+          </a:xfrm>
+          <a:prstGeom prst="roundRect">
+            <a:avLst>
+              <a:gd name="adj" fmla="val 13333"/>
+            </a:avLst>
+          </a:prstGeom>
+          <a:solidFill>
+            <a:srgbClr val="EEF2FF"/>
+          </a:solidFill>
+          <a:ln w="12700">
+            <a:solidFill>
+              <a:srgbClr val="C7D2FE"/>
+            </a:solidFill>
+            <a:prstDash val="solid"/>
+          </a:ln>
+        </p:spPr>
+      </p:sp>
+      <p:sp>
+        <p:nvSpPr>
+          <p:cNvPr id="9" name="Text 7"/>
+          <p:cNvSpPr txBox="1"/>
+          <p:nvPr/>
+        </p:nvSpPr>
+        <p:spPr>
+          <a:xfrm>
+            <a:off x="777240" y="3246120"/>
+            <a:ext cx="7680960" cy="548640"/>
+          </a:xfrm>
+          <a:prstGeom prst="rect">
+            <a:avLst/>
+          </a:prstGeom>
+          <a:noFill/>
+          <a:ln/>
+        </p:spPr>
+        <p:txBody>
+          <a:bodyPr wrap="square" lIns="0" tIns="0" rIns="0" bIns="0" rtlCol="0" anchor="ctr">
+            <a:normAutofit/>
+          </a:bodyPr>
+          <a:lstStyle/>
+          <a:p>
+            <a:pPr indent="0" marL="0">
+              <a:buNone/>
+            </a:pPr>
+            <a:r>
+              <a:rPr lang="en-US" sz="1800" dirty="0">
+                <a:solidFill>
+                  <a:srgbClr val="1F2937"/>
+                </a:solidFill>
+              </a:rPr>
+              <a:t>C)  Valor absoluto</a:t>
+            </a:r>
+            <a:endParaRPr lang="en-US" sz="1800" dirty="0"/>
+          </a:p>
+        </p:txBody>
+      </p:sp>
+      <p:sp>
+        <p:nvSpPr>
+          <p:cNvPr id="10" name="Shape 8"/>
+          <p:cNvSpPr/>
+          <p:nvPr/>
+        </p:nvSpPr>
+        <p:spPr>
+          <a:xfrm>
+            <a:off x="548640" y="3886200"/>
+            <a:ext cx="8046720" cy="548640"/>
+          </a:xfrm>
+          <a:prstGeom prst="roundRect">
+            <a:avLst>
+              <a:gd name="adj" fmla="val 13333"/>
+            </a:avLst>
+          </a:prstGeom>
+          <a:solidFill>
+            <a:srgbClr val="EEF2FF"/>
+          </a:solidFill>
+          <a:ln w="12700">
+            <a:solidFill>
+              <a:srgbClr val="C7D2FE"/>
+            </a:solidFill>
+            <a:prstDash val="solid"/>
+          </a:ln>
+        </p:spPr>
+      </p:sp>
+      <p:sp>
+        <p:nvSpPr>
+          <p:cNvPr id="11" name="Text 9"/>
+          <p:cNvSpPr txBox="1"/>
+          <p:nvPr/>
+        </p:nvSpPr>
+        <p:spPr>
+          <a:xfrm>
+            <a:off x="777240" y="3886200"/>
+            <a:ext cx="7680960" cy="548640"/>
+          </a:xfrm>
+          <a:prstGeom prst="rect">
+            <a:avLst/>
+          </a:prstGeom>
+          <a:noFill/>
+          <a:ln/>
+        </p:spPr>
+        <p:txBody>
+          <a:bodyPr wrap="square" lIns="0" tIns="0" rIns="0" bIns="0" rtlCol="0" anchor="ctr">
+            <a:normAutofit/>
+          </a:bodyPr>
+          <a:lstStyle/>
+          <a:p>
+            <a:pPr indent="0" marL="0">
+              <a:buNone/>
+            </a:pPr>
+            <a:r>
+              <a:rPr lang="en-US" sz="1800" dirty="0">
+                <a:solidFill>
+                  <a:srgbClr val="1F2937"/>
+                </a:solidFill>
+              </a:rPr>
+              <a:t>D)  Qualquer função</a:t>
+            </a:r>
+            <a:endParaRPr lang="en-US" sz="1800" dirty="0"/>
+          </a:p>
+        </p:txBody>
+      </p:sp>
+      <p:sp>
+        <p:nvSpPr>
+          <p:cNvPr id="25" name="Slide Number Placeholder 0"/>
+          <p:cNvSpPr>
+            <a:spLocks noGrp="1"/>
+          </p:cNvSpPr>
+          <p:nvPr>
+            <p:ph type="sldNum" sz="quarter" idx="4294967295"/>
+          </p:nvPr>
+        </p:nvSpPr>
+        <p:spPr>
+          <a:xfrm>
+            <a:off x="8412480" y="4828032"/>
+            <a:ext cx="457200" cy="228600"/>
+          </a:xfrm>
+          <a:prstGeom prst="rect">
+            <a:avLst/>
+          </a:prstGeom>
+          <a:extLst>
+            <a:ext uri="{C572A759-6A51-4108-AA02-DFA0A04FC94B}">
+              <ma14:wrappingTextBoxFlag xmlns:ma14="http://schemas.microsoft.com/office/mac/drawingml/2011/main" val="0"/>
+            </a:ext>
+          </a:extLst>
+        </p:spPr>
+        <p:txBody>
+          <a:bodyPr/>
+          <a:lstStyle>
+            <a:lvl1pPr>
+              <a:defRPr sz="900">
+                <a:solidFill>
+                  <a:srgbClr val="6B7280"/>
+                </a:solidFill>
+              </a:defRPr>
+            </a:lvl1pPr>
+          </a:lstStyle>
+          <a:p>
+            <a:pPr algn="l"/>
+            <a:fld id="{F7021451-1387-4CA6-816F-3879F97B5CBC}" type="slidenum">
+              <a:rPr b="0" lang="en-US"/>
+              <a:t>16</a:t>
+            </a:fld>
+            <a:endParaRPr lang="en-US"/>
+          </a:p>
+        </p:txBody>
+      </p:sp>
+    </p:spTree>
+  </p:cSld>
+  <p:clrMapOvr>
+    <a:masterClrMapping/>
+  </p:clrMapOvr>
+</p:sld>
+</file>
+
+<file path=ppt/slides/slide17.xml><?xml version="1.0" encoding="utf-8"?>
+<p:sld xmlns:a="http://schemas.openxmlformats.org/drawingml/2006/main" xmlns:r="http://schemas.openxmlformats.org/officeDocument/2006/relationships" xmlns:p="http://schemas.openxmlformats.org/presentationml/2006/main">
+  <p:cSld name="Slide 17">
+    <p:spTree>
+      <p:nvGrpSpPr>
+        <p:cNvPr id="1" name=""/>
+        <p:cNvGrpSpPr/>
+        <p:nvPr/>
+      </p:nvGrpSpPr>
+      <p:grpSpPr>
+        <a:xfrm>
+          <a:off x="0" y="0"/>
+          <a:ext cx="0" cy="0"/>
+          <a:chOff x="0" y="0"/>
+          <a:chExt cx="0" cy="0"/>
+        </a:xfrm>
+      </p:grpSpPr>
+      <p:sp>
+        <p:nvSpPr>
+          <p:cNvPr id="2" name="Text 0"/>
+          <p:cNvSpPr txBox="1"/>
+          <p:nvPr/>
+        </p:nvSpPr>
+        <p:spPr>
+          <a:xfrm>
+            <a:off x="365760" y="109728"/>
+            <a:ext cx="8412480" cy="658368"/>
+          </a:xfrm>
+          <a:prstGeom prst="rect">
+            <a:avLst/>
+          </a:prstGeom>
+          <a:noFill/>
+          <a:ln/>
+        </p:spPr>
+        <p:txBody>
+          <a:bodyPr wrap="square" lIns="0" tIns="0" rIns="0" bIns="0" rtlCol="0" anchor="ctr">
+            <a:normAutofit/>
+          </a:bodyPr>
+          <a:lstStyle/>
+          <a:p>
+            <a:pPr indent="0" marL="0">
+              <a:buNone/>
+            </a:pPr>
+            <a:r>
+              <a:rPr lang="en-US" sz="2600" b="1" dirty="0">
+                <a:solidFill>
+                  <a:srgbClr val="FFFFFF"/>
+                </a:solidFill>
+                <a:latin typeface="Calibri" pitchFamily="34" charset="0"/>
+                <a:ea typeface="Calibri" pitchFamily="34" charset="-122"/>
+                <a:cs typeface="Calibri" pitchFamily="34" charset="-120"/>
+              </a:rPr>
+              <a:t>Atividade</a:t>
+            </a:r>
+            <a:endParaRPr lang="en-US" sz="2600" dirty="0"/>
+          </a:p>
+        </p:txBody>
+      </p:sp>
+      <p:sp>
+        <p:nvSpPr>
+          <p:cNvPr id="3" name="Shape 1"/>
+          <p:cNvSpPr/>
+          <p:nvPr/>
+        </p:nvSpPr>
+        <p:spPr>
+          <a:xfrm>
+            <a:off x="548640" y="1188720"/>
+            <a:ext cx="8046720" cy="3108960"/>
+          </a:xfrm>
+          <a:prstGeom prst="roundRect">
+            <a:avLst>
+              <a:gd name="adj" fmla="val 3529"/>
+            </a:avLst>
+          </a:prstGeom>
+          <a:solidFill>
+            <a:srgbClr val="FFFBEB"/>
+          </a:solidFill>
+          <a:ln w="25400">
+            <a:solidFill>
+              <a:srgbClr val="F59E0B"/>
+            </a:solidFill>
+            <a:prstDash val="solid"/>
+          </a:ln>
+        </p:spPr>
+      </p:sp>
+      <p:sp>
+        <p:nvSpPr>
+          <p:cNvPr id="4" name="Text 2"/>
+          <p:cNvSpPr txBox="1"/>
+          <p:nvPr/>
+        </p:nvSpPr>
+        <p:spPr>
+          <a:xfrm>
+            <a:off x="822960" y="1325880"/>
+            <a:ext cx="3657600" cy="365760"/>
+          </a:xfrm>
+          <a:prstGeom prst="rect">
+            <a:avLst/>
+          </a:prstGeom>
+          <a:noFill/>
+          <a:ln/>
+        </p:spPr>
+        <p:txBody>
+          <a:bodyPr wrap="square" lIns="0" tIns="0" rIns="0" bIns="0" rtlCol="0" anchor="ctr"/>
+          <a:lstStyle/>
+          <a:p>
+            <a:pPr indent="0" marL="0">
+              <a:buNone/>
+            </a:pPr>
+            <a:r>
+              <a:rPr lang="en-US" sz="1400" b="1" spc="300" kern="0" dirty="0">
+                <a:solidFill>
+                  <a:srgbClr val="B45309"/>
+                </a:solidFill>
+              </a:rPr>
+              <a:t>MÃO NA MASSA</a:t>
+            </a:r>
+            <a:endParaRPr lang="en-US" sz="1400" dirty="0"/>
+          </a:p>
+        </p:txBody>
+      </p:sp>
+      <p:sp>
+        <p:nvSpPr>
+          <p:cNvPr id="5" name="Text 3"/>
+          <p:cNvSpPr txBox="1"/>
+          <p:nvPr/>
+        </p:nvSpPr>
+        <p:spPr>
+          <a:xfrm>
+            <a:off x="822960" y="1783080"/>
+            <a:ext cx="7498080" cy="2377440"/>
+          </a:xfrm>
+          <a:prstGeom prst="rect">
+            <a:avLst/>
+          </a:prstGeom>
+          <a:noFill/>
+          <a:ln/>
+        </p:spPr>
+        <p:txBody>
+          <a:bodyPr wrap="square" lIns="0" tIns="0" rIns="0" bIns="0" rtlCol="0" anchor="t">
+            <a:normAutofit/>
+          </a:bodyPr>
+          <a:lstStyle/>
+          <a:p>
+            <a:pPr indent="0" marL="0">
+              <a:buNone/>
+            </a:pPr>
+            <a:r>
+              <a:rPr lang="en-US" sz="2100" dirty="0">
+                <a:solidFill>
+                  <a:srgbClr val="1F2937"/>
+                </a:solidFill>
+              </a:rPr>
+              <a:t>Dados J = [[1,0],[0,2],[1,1]] e r = (1, −1, 0,5): calcule g, JᵀJ, o passo de Gauss–Newton e o de LM com μ = 1. Compare as normas.</a:t>
+            </a:r>
+            <a:endParaRPr lang="en-US" sz="2100" dirty="0"/>
+          </a:p>
+        </p:txBody>
+      </p:sp>
+      <p:sp>
+        <p:nvSpPr>
+          <p:cNvPr id="25" name="Slide Number Placeholder 0"/>
+          <p:cNvSpPr>
+            <a:spLocks noGrp="1"/>
+          </p:cNvSpPr>
+          <p:nvPr>
+            <p:ph type="sldNum" sz="quarter" idx="4294967295"/>
+          </p:nvPr>
+        </p:nvSpPr>
+        <p:spPr>
+          <a:xfrm>
+            <a:off x="8412480" y="4828032"/>
+            <a:ext cx="457200" cy="228600"/>
+          </a:xfrm>
+          <a:prstGeom prst="rect">
+            <a:avLst/>
+          </a:prstGeom>
+          <a:extLst>
+            <a:ext uri="{C572A759-6A51-4108-AA02-DFA0A04FC94B}">
+              <ma14:wrappingTextBoxFlag xmlns:ma14="http://schemas.microsoft.com/office/mac/drawingml/2011/main" val="0"/>
+            </a:ext>
+          </a:extLst>
+        </p:spPr>
+        <p:txBody>
+          <a:bodyPr/>
+          <a:lstStyle>
+            <a:lvl1pPr>
+              <a:defRPr sz="900">
+                <a:solidFill>
+                  <a:srgbClr val="6B7280"/>
+                </a:solidFill>
+              </a:defRPr>
+            </a:lvl1pPr>
+          </a:lstStyle>
+          <a:p>
+            <a:pPr algn="l"/>
+            <a:fld id="{F7021451-1387-4CA6-816F-3879F97B5CBC}" type="slidenum">
+              <a:rPr b="0" lang="en-US"/>
+              <a:t>17</a:t>
+            </a:fld>
+            <a:endParaRPr lang="en-US"/>
+          </a:p>
+        </p:txBody>
+      </p:sp>
+    </p:spTree>
+  </p:cSld>
+  <p:clrMapOvr>
+    <a:masterClrMapping/>
+  </p:clrMapOvr>
+</p:sld>
+</file>
+
+<file path=ppt/slides/slide18.xml><?xml version="1.0" encoding="utf-8"?>
+<p:sld xmlns:a="http://schemas.openxmlformats.org/drawingml/2006/main" xmlns:r="http://schemas.openxmlformats.org/officeDocument/2006/relationships" xmlns:p="http://schemas.openxmlformats.org/presentationml/2006/main">
+  <p:cSld name="Slide 18">
+    <p:spTree>
+      <p:nvGrpSpPr>
+        <p:cNvPr id="1" name=""/>
+        <p:cNvGrpSpPr/>
+        <p:nvPr/>
+      </p:nvGrpSpPr>
+      <p:grpSpPr>
+        <a:xfrm>
+          <a:off x="0" y="0"/>
+          <a:ext cx="0" cy="0"/>
+          <a:chOff x="0" y="0"/>
+          <a:chExt cx="0" cy="0"/>
+        </a:xfrm>
+      </p:grpSpPr>
+      <p:sp>
+        <p:nvSpPr>
+          <p:cNvPr id="2" name="Text 0"/>
+          <p:cNvSpPr txBox="1"/>
+          <p:nvPr/>
+        </p:nvSpPr>
+        <p:spPr>
+          <a:xfrm>
             <a:off x="640080" y="457200"/>
             <a:ext cx="7863840" cy="731520"/>
           </a:xfrm>
@@ -3063,6 +5020,130 @@
               <a:t>Excelente em redes pequenas; limitado por memória e custo</a:t>
             </a:r>
             <a:endParaRPr lang="en-US" sz="2200" dirty="0"/>
+          </a:p>
+        </p:txBody>
+      </p:sp>
+    </p:spTree>
+  </p:cSld>
+  <p:clrMapOvr>
+    <a:masterClrMapping/>
+  </p:clrMapOvr>
+</p:sld>
+</file>
+
+<file path=ppt/slides/slide19.xml><?xml version="1.0" encoding="utf-8"?>
+<p:sld xmlns:a="http://schemas.openxmlformats.org/drawingml/2006/main" xmlns:r="http://schemas.openxmlformats.org/officeDocument/2006/relationships" xmlns:p="http://schemas.openxmlformats.org/presentationml/2006/main">
+  <p:cSld name="Slide 19">
+    <p:spTree>
+      <p:nvGrpSpPr>
+        <p:cNvPr id="1" name=""/>
+        <p:cNvGrpSpPr/>
+        <p:nvPr/>
+      </p:nvGrpSpPr>
+      <p:grpSpPr>
+        <a:xfrm>
+          <a:off x="0" y="0"/>
+          <a:ext cx="0" cy="0"/>
+          <a:chOff x="0" y="0"/>
+          <a:chExt cx="0" cy="0"/>
+        </a:xfrm>
+      </p:grpSpPr>
+      <p:sp>
+        <p:nvSpPr>
+          <p:cNvPr id="2" name="Shape 0"/>
+          <p:cNvSpPr/>
+          <p:nvPr/>
+        </p:nvSpPr>
+        <p:spPr>
+          <a:xfrm>
+            <a:off x="640080" y="1188720"/>
+            <a:ext cx="109728" cy="2194560"/>
+          </a:xfrm>
+          <a:prstGeom prst="rect">
+            <a:avLst/>
+          </a:prstGeom>
+          <a:solidFill>
+            <a:srgbClr val="F59E0B"/>
+          </a:solidFill>
+          <a:ln w="12700">
+            <a:solidFill>
+              <a:srgbClr val="F59E0B"/>
+            </a:solidFill>
+            <a:prstDash val="solid"/>
+          </a:ln>
+        </p:spPr>
+      </p:sp>
+      <p:sp>
+        <p:nvSpPr>
+          <p:cNvPr id="3" name="Text 1"/>
+          <p:cNvSpPr txBox="1"/>
+          <p:nvPr/>
+        </p:nvSpPr>
+        <p:spPr>
+          <a:xfrm>
+            <a:off x="1005840" y="1097280"/>
+            <a:ext cx="7498080" cy="2377440"/>
+          </a:xfrm>
+          <a:prstGeom prst="rect">
+            <a:avLst/>
+          </a:prstGeom>
+          <a:noFill/>
+          <a:ln/>
+        </p:spPr>
+        <p:txBody>
+          <a:bodyPr wrap="square" lIns="0" tIns="0" rIns="0" bIns="0" rtlCol="0" anchor="ctr">
+            <a:normAutofit/>
+          </a:bodyPr>
+          <a:lstStyle/>
+          <a:p>
+            <a:pPr indent="0" marL="0">
+              <a:buNone/>
+            </a:pPr>
+            <a:r>
+              <a:rPr lang="en-US" sz="3400" b="1" dirty="0">
+                <a:solidFill>
+                  <a:srgbClr val="FFFFFF"/>
+                </a:solidFill>
+              </a:rPr>
+              <a:t>“LM: a curvatura de graça, quando o erro é soma de quadrados.”</a:t>
+            </a:r>
+            <a:endParaRPr lang="en-US" sz="3400" dirty="0"/>
+          </a:p>
+        </p:txBody>
+      </p:sp>
+      <p:sp>
+        <p:nvSpPr>
+          <p:cNvPr id="4" name="Text 2"/>
+          <p:cNvSpPr txBox="1"/>
+          <p:nvPr/>
+        </p:nvSpPr>
+        <p:spPr>
+          <a:xfrm>
+            <a:off x="1005840" y="3931920"/>
+            <a:ext cx="7315200" cy="365760"/>
+          </a:xfrm>
+          <a:prstGeom prst="rect">
+            <a:avLst/>
+          </a:prstGeom>
+          <a:noFill/>
+          <a:ln/>
+        </p:spPr>
+        <p:txBody>
+          <a:bodyPr wrap="square" lIns="0" tIns="0" rIns="0" bIns="0" rtlCol="0" anchor="ctr"/>
+          <a:lstStyle/>
+          <a:p>
+            <a:pPr indent="0" marL="0">
+              <a:buNone/>
+            </a:pPr>
+            <a:r>
+              <a:rPr lang="en-US" sz="1400" dirty="0">
+                <a:solidFill>
+                  <a:srgbClr val="A5B4FC"/>
+                </a:solidFill>
+              </a:rPr>
+              <a:t>Backpropagation e Redes Neurais · Capítulo 7</a:t>
+            </a:r>
+            <a:endParaRPr lang="en-US" sz="1400" dirty="0"/>
           </a:p>
         </p:txBody>
       </p:sp>
@@ -3126,7 +5207,7 @@
                 <a:ea typeface="Calibri" pitchFamily="34" charset="-122"/>
                 <a:cs typeface="Calibri" pitchFamily="34" charset="-120"/>
               </a:rPr>
-              <a:t>Situação inicial: o vale estreito e curvo</a:t>
+              <a:t>Roteiro da aula</a:t>
             </a:r>
             <a:endParaRPr lang="en-US" sz="2600" dirty="0"/>
           </a:p>
@@ -3140,8 +5221,8 @@
         </p:nvSpPr>
         <p:spPr>
           <a:xfrm>
-            <a:off x="548640" y="1188720"/>
-            <a:ext cx="8046720" cy="3383280"/>
+            <a:off x="731520" y="1188720"/>
+            <a:ext cx="7680960" cy="3291840"/>
           </a:xfrm>
           <a:prstGeom prst="rect">
             <a:avLst/>
@@ -3150,63 +5231,121 @@
           <a:ln/>
         </p:spPr>
         <p:txBody>
-          <a:bodyPr wrap="square" lIns="0" tIns="0" rIns="0" bIns="0" rtlCol="0" anchor="t">
-            <a:normAutofit/>
-          </a:bodyPr>
+          <a:bodyPr wrap="square" lIns="0" tIns="0" rIns="0" bIns="0" rtlCol="0" anchor="t"/>
           <a:lstStyle/>
           <a:p>
             <a:pPr marL="342900" indent="-342900">
               <a:spcAft>
-                <a:spcPts val="1400"/>
+                <a:spcPts val="1200"/>
               </a:spcAft>
               <a:buSzPct val="100000"/>
-              <a:buChar char="•"/>
-            </a:pPr>
-            <a:r>
-              <a:rPr lang="en-US" sz="2400" dirty="0">
+              <a:buFont typeface="+mj-lt"/>
+              <a:buAutoNum type="arabicPeriod" startAt="1"/>
+            </a:pPr>
+            <a:r>
+              <a:rPr lang="en-US" sz="2200" dirty="0">
                 <a:solidFill>
                   <a:srgbClr val="1F2937"/>
                 </a:solidFill>
               </a:rPr>
-              <a:t>Gradiente: zigue-zague</a:t>
-            </a:r>
-            <a:endParaRPr lang="en-US" sz="2400" dirty="0"/>
+              <a:t>Situação inicial e objetivos</a:t>
+            </a:r>
+            <a:endParaRPr lang="en-US" sz="2200" dirty="0"/>
           </a:p>
           <a:p>
             <a:pPr marL="342900" indent="-342900">
               <a:spcAft>
-                <a:spcPts val="1400"/>
+                <a:spcPts val="1200"/>
               </a:spcAft>
               <a:buSzPct val="100000"/>
-              <a:buChar char="•"/>
-            </a:pPr>
-            <a:r>
-              <a:rPr lang="en-US" sz="2400" dirty="0">
+              <a:buFont typeface="+mj-lt"/>
+              <a:buAutoNum type="arabicPeriod" startAt="1"/>
+            </a:pPr>
+            <a:r>
+              <a:rPr lang="en-US" sz="2200" dirty="0">
                 <a:solidFill>
                   <a:srgbClr val="1F2937"/>
                 </a:solidFill>
               </a:rPr>
-              <a:t>Newton: caro e pode ir para um máximo</a:t>
-            </a:r>
-            <a:endParaRPr lang="en-US" sz="2400" dirty="0"/>
+              <a:t>Analogia do dia a dia</a:t>
+            </a:r>
+            <a:endParaRPr lang="en-US" sz="2200" dirty="0"/>
           </a:p>
           <a:p>
             <a:pPr marL="342900" indent="-342900">
               <a:spcAft>
-                <a:spcPts val="1400"/>
+                <a:spcPts val="1200"/>
               </a:spcAft>
               <a:buSzPct val="100000"/>
-              <a:buChar char="•"/>
-            </a:pPr>
-            <a:r>
-              <a:rPr lang="en-US" sz="2400" dirty="0">
+              <a:buFont typeface="+mj-lt"/>
+              <a:buAutoNum type="arabicPeriod" startAt="1"/>
+            </a:pPr>
+            <a:r>
+              <a:rPr lang="en-US" sz="2200" dirty="0">
                 <a:solidFill>
                   <a:srgbClr val="1F2937"/>
                 </a:solidFill>
               </a:rPr>
-              <a:t>Em soma de quadrados, a Jacobiana basta</a:t>
-            </a:r>
-            <a:endParaRPr lang="en-US" sz="2400" dirty="0"/>
+              <a:t>Conceitos, demonstrações e figuras</a:t>
+            </a:r>
+            <a:endParaRPr lang="en-US" sz="2200" dirty="0"/>
+          </a:p>
+          <a:p>
+            <a:pPr marL="342900" indent="-342900">
+              <a:spcAft>
+                <a:spcPts val="1200"/>
+              </a:spcAft>
+              <a:buSzPct val="100000"/>
+              <a:buFont typeface="+mj-lt"/>
+              <a:buAutoNum type="arabicPeriod" startAt="1"/>
+            </a:pPr>
+            <a:r>
+              <a:rPr lang="en-US" sz="2200" dirty="0">
+                <a:solidFill>
+                  <a:srgbClr val="1F2937"/>
+                </a:solidFill>
+              </a:rPr>
+              <a:t>Exemplos e resultados do livro</a:t>
+            </a:r>
+            <a:endParaRPr lang="en-US" sz="2200" dirty="0"/>
+          </a:p>
+          <a:p>
+            <a:pPr marL="342900" indent="-342900">
+              <a:spcAft>
+                <a:spcPts val="1200"/>
+              </a:spcAft>
+              <a:buSzPct val="100000"/>
+              <a:buFont typeface="+mj-lt"/>
+              <a:buAutoNum type="arabicPeriod" startAt="1"/>
+            </a:pPr>
+            <a:r>
+              <a:rPr lang="en-US" sz="2200" dirty="0">
+                <a:solidFill>
+                  <a:srgbClr val="1F2937"/>
+                </a:solidFill>
+              </a:rPr>
+              <a:t>Quiz relâmpago</a:t>
+            </a:r>
+            <a:endParaRPr lang="en-US" sz="2200" dirty="0"/>
+          </a:p>
+          <a:p>
+            <a:pPr marL="342900" indent="-342900">
+              <a:spcAft>
+                <a:spcPts val="1200"/>
+              </a:spcAft>
+              <a:buSzPct val="100000"/>
+              <a:buFont typeface="+mj-lt"/>
+              <a:buAutoNum type="arabicPeriod" startAt="1"/>
+            </a:pPr>
+            <a:r>
+              <a:rPr lang="en-US" sz="2200" dirty="0">
+                <a:solidFill>
+                  <a:srgbClr val="1F2937"/>
+                </a:solidFill>
+              </a:rPr>
+              <a:t>Atividade mão na massa e síntese</a:t>
+            </a:r>
+            <a:endParaRPr lang="en-US" sz="2200" dirty="0"/>
           </a:p>
         </p:txBody>
       </p:sp>
@@ -3315,7 +5454,7 @@
                 <a:ea typeface="Calibri" pitchFamily="34" charset="-122"/>
                 <a:cs typeface="Calibri" pitchFamily="34" charset="-120"/>
               </a:rPr>
-              <a:t>Da série de Taylor a Newton</a:t>
+              <a:t>Situação inicial: o vale estreito e curvo</a:t>
             </a:r>
             <a:endParaRPr lang="en-US" sz="2600" dirty="0"/>
           </a:p>
@@ -3323,41 +5462,14 @@
       </p:sp>
       <p:sp>
         <p:nvSpPr>
-          <p:cNvPr id="3" name="Shape 1"/>
-          <p:cNvSpPr/>
-          <p:nvPr/>
-        </p:nvSpPr>
-        <p:spPr>
-          <a:xfrm>
-            <a:off x="457200" y="1097280"/>
-            <a:ext cx="8229600" cy="868680"/>
-          </a:xfrm>
-          <a:prstGeom prst="roundRect">
-            <a:avLst>
-              <a:gd name="adj" fmla="val 8421"/>
-            </a:avLst>
-          </a:prstGeom>
-          <a:solidFill>
-            <a:srgbClr val="E0E7FF"/>
-          </a:solidFill>
-          <a:ln w="9525">
-            <a:solidFill>
-              <a:srgbClr val="C7D2FE"/>
-            </a:solidFill>
-            <a:prstDash val="solid"/>
-          </a:ln>
-        </p:spPr>
-      </p:sp>
-      <p:sp>
-        <p:nvSpPr>
-          <p:cNvPr id="4" name="Text 2"/>
+          <p:cNvPr id="3" name="Text 1"/>
           <p:cNvSpPr txBox="1"/>
           <p:nvPr/>
         </p:nvSpPr>
         <p:spPr>
           <a:xfrm>
-            <a:off x="594360" y="1097280"/>
-            <a:ext cx="2743200" cy="868680"/>
+            <a:off x="548640" y="1188720"/>
+            <a:ext cx="8046720" cy="3383280"/>
           </a:xfrm>
           <a:prstGeom prst="rect">
             <a:avLst/>
@@ -3366,276 +5478,63 @@
           <a:ln/>
         </p:spPr>
         <p:txBody>
-          <a:bodyPr wrap="square" lIns="0" tIns="0" rIns="0" bIns="0" rtlCol="0" anchor="ctr">
+          <a:bodyPr wrap="square" lIns="0" tIns="0" rIns="0" bIns="0" rtlCol="0" anchor="t">
             <a:normAutofit/>
           </a:bodyPr>
           <a:lstStyle/>
           <a:p>
-            <a:pPr indent="0" marL="0">
-              <a:buNone/>
-            </a:pPr>
-            <a:r>
-              <a:rPr lang="en-US" sz="1400" b="1" dirty="0">
-                <a:solidFill>
-                  <a:srgbClr val="312E81"/>
-                </a:solidFill>
-              </a:rPr>
-              <a:t>1. Taylor</a:t>
-            </a:r>
-            <a:endParaRPr lang="en-US" sz="1400" dirty="0"/>
-          </a:p>
-        </p:txBody>
-      </p:sp>
-      <p:sp>
-        <p:nvSpPr>
-          <p:cNvPr id="5" name="Text 3"/>
-          <p:cNvSpPr txBox="1"/>
-          <p:nvPr/>
-        </p:nvSpPr>
-        <p:spPr>
-          <a:xfrm>
-            <a:off x="3383280" y="1097280"/>
-            <a:ext cx="5212080" cy="868680"/>
-          </a:xfrm>
-          <a:prstGeom prst="rect">
-            <a:avLst/>
-          </a:prstGeom>
-          <a:noFill/>
-          <a:ln/>
-        </p:spPr>
-        <p:txBody>
-          <a:bodyPr wrap="square" lIns="0" tIns="0" rIns="0" bIns="0" rtlCol="0" anchor="ctr">
-            <a:normAutofit/>
-          </a:bodyPr>
-          <a:lstStyle/>
-          <a:p>
-            <a:pPr indent="0" marL="0">
-              <a:buNone/>
-            </a:pPr>
-            <a:r>
-              <a:rPr lang="en-US" sz="1700" dirty="0">
+            <a:pPr marL="342900" indent="-342900">
+              <a:spcAft>
+                <a:spcPts val="1400"/>
+              </a:spcAft>
+              <a:buSzPct val="100000"/>
+              <a:buChar char="•"/>
+            </a:pPr>
+            <a:r>
+              <a:rPr lang="en-US" sz="2400" dirty="0">
                 <a:solidFill>
                   <a:srgbClr val="1F2937"/>
                 </a:solidFill>
-                <a:latin typeface="Cambria Math" pitchFamily="34" charset="0"/>
-                <a:ea typeface="Cambria Math" pitchFamily="34" charset="-122"/>
-                <a:cs typeface="Cambria Math" pitchFamily="34" charset="-120"/>
-              </a:rPr>
-              <a:t>E(θ+d) ≈ E + gᵀd + ½ dᵀH d</a:t>
-            </a:r>
-            <a:endParaRPr lang="en-US" sz="1700" dirty="0"/>
-          </a:p>
-        </p:txBody>
-      </p:sp>
-      <p:sp>
-        <p:nvSpPr>
-          <p:cNvPr id="6" name="Shape 4"/>
-          <p:cNvSpPr/>
-          <p:nvPr/>
-        </p:nvSpPr>
-        <p:spPr>
-          <a:xfrm>
-            <a:off x="457200" y="2039112"/>
-            <a:ext cx="8229600" cy="868680"/>
-          </a:xfrm>
-          <a:prstGeom prst="roundRect">
-            <a:avLst>
-              <a:gd name="adj" fmla="val 8421"/>
-            </a:avLst>
-          </a:prstGeom>
-          <a:solidFill>
-            <a:srgbClr val="EEF2FF"/>
-          </a:solidFill>
-          <a:ln w="9525">
-            <a:solidFill>
-              <a:srgbClr val="C7D2FE"/>
-            </a:solidFill>
-            <a:prstDash val="solid"/>
-          </a:ln>
-        </p:spPr>
-      </p:sp>
-      <p:sp>
-        <p:nvSpPr>
-          <p:cNvPr id="7" name="Text 5"/>
-          <p:cNvSpPr txBox="1"/>
-          <p:nvPr/>
-        </p:nvSpPr>
-        <p:spPr>
-          <a:xfrm>
-            <a:off x="594360" y="2039112"/>
-            <a:ext cx="2743200" cy="868680"/>
-          </a:xfrm>
-          <a:prstGeom prst="rect">
-            <a:avLst/>
-          </a:prstGeom>
-          <a:noFill/>
-          <a:ln/>
-        </p:spPr>
-        <p:txBody>
-          <a:bodyPr wrap="square" lIns="0" tIns="0" rIns="0" bIns="0" rtlCol="0" anchor="ctr">
-            <a:normAutofit/>
-          </a:bodyPr>
-          <a:lstStyle/>
-          <a:p>
-            <a:pPr indent="0" marL="0">
-              <a:buNone/>
-            </a:pPr>
-            <a:r>
-              <a:rPr lang="en-US" sz="1400" b="1" dirty="0">
-                <a:solidFill>
-                  <a:srgbClr val="312E81"/>
-                </a:solidFill>
-              </a:rPr>
-              <a:t>2. Mínimo do modelo</a:t>
-            </a:r>
-            <a:endParaRPr lang="en-US" sz="1400" dirty="0"/>
-          </a:p>
-        </p:txBody>
-      </p:sp>
-      <p:sp>
-        <p:nvSpPr>
-          <p:cNvPr id="8" name="Text 6"/>
-          <p:cNvSpPr txBox="1"/>
-          <p:nvPr/>
-        </p:nvSpPr>
-        <p:spPr>
-          <a:xfrm>
-            <a:off x="3383280" y="2039112"/>
-            <a:ext cx="5212080" cy="868680"/>
-          </a:xfrm>
-          <a:prstGeom prst="rect">
-            <a:avLst/>
-          </a:prstGeom>
-          <a:noFill/>
-          <a:ln/>
-        </p:spPr>
-        <p:txBody>
-          <a:bodyPr wrap="square" lIns="0" tIns="0" rIns="0" bIns="0" rtlCol="0" anchor="ctr">
-            <a:normAutofit/>
-          </a:bodyPr>
-          <a:lstStyle/>
-          <a:p>
-            <a:pPr indent="0" marL="0">
-              <a:buNone/>
-            </a:pPr>
-            <a:r>
-              <a:rPr lang="en-US" sz="1700" dirty="0">
+              </a:rPr>
+              <a:t>Gradiente: zigue-zague</a:t>
+            </a:r>
+            <a:endParaRPr lang="en-US" sz="2400" dirty="0"/>
+          </a:p>
+          <a:p>
+            <a:pPr marL="342900" indent="-342900">
+              <a:spcAft>
+                <a:spcPts val="1400"/>
+              </a:spcAft>
+              <a:buSzPct val="100000"/>
+              <a:buChar char="•"/>
+            </a:pPr>
+            <a:r>
+              <a:rPr lang="en-US" sz="2400" dirty="0">
                 <a:solidFill>
                   <a:srgbClr val="1F2937"/>
                 </a:solidFill>
-                <a:latin typeface="Cambria Math" pitchFamily="34" charset="0"/>
-                <a:ea typeface="Cambria Math" pitchFamily="34" charset="-122"/>
-                <a:cs typeface="Cambria Math" pitchFamily="34" charset="-120"/>
-              </a:rPr>
-              <a:t>H d = −g</a:t>
-            </a:r>
-            <a:endParaRPr lang="en-US" sz="1700" dirty="0"/>
-          </a:p>
-        </p:txBody>
-      </p:sp>
-      <p:sp>
-        <p:nvSpPr>
-          <p:cNvPr id="9" name="Shape 7"/>
-          <p:cNvSpPr/>
-          <p:nvPr/>
-        </p:nvSpPr>
-        <p:spPr>
-          <a:xfrm>
-            <a:off x="457200" y="2980944"/>
-            <a:ext cx="8229600" cy="868680"/>
-          </a:xfrm>
-          <a:prstGeom prst="roundRect">
-            <a:avLst>
-              <a:gd name="adj" fmla="val 8421"/>
-            </a:avLst>
-          </a:prstGeom>
-          <a:solidFill>
-            <a:srgbClr val="E0E7FF"/>
-          </a:solidFill>
-          <a:ln w="9525">
-            <a:solidFill>
-              <a:srgbClr val="C7D2FE"/>
-            </a:solidFill>
-            <a:prstDash val="solid"/>
-          </a:ln>
-        </p:spPr>
-      </p:sp>
-      <p:sp>
-        <p:nvSpPr>
-          <p:cNvPr id="10" name="Text 8"/>
-          <p:cNvSpPr txBox="1"/>
-          <p:nvPr/>
-        </p:nvSpPr>
-        <p:spPr>
-          <a:xfrm>
-            <a:off x="594360" y="2980944"/>
-            <a:ext cx="2743200" cy="868680"/>
-          </a:xfrm>
-          <a:prstGeom prst="rect">
-            <a:avLst/>
-          </a:prstGeom>
-          <a:noFill/>
-          <a:ln/>
-        </p:spPr>
-        <p:txBody>
-          <a:bodyPr wrap="square" lIns="0" tIns="0" rIns="0" bIns="0" rtlCol="0" anchor="ctr">
-            <a:normAutofit/>
-          </a:bodyPr>
-          <a:lstStyle/>
-          <a:p>
-            <a:pPr indent="0" marL="0">
-              <a:buNone/>
-            </a:pPr>
-            <a:r>
-              <a:rPr lang="en-US" sz="1400" b="1" dirty="0">
-                <a:solidFill>
-                  <a:srgbClr val="312E81"/>
-                </a:solidFill>
-              </a:rPr>
-              <a:t>3. Newton modificado</a:t>
-            </a:r>
-            <a:endParaRPr lang="en-US" sz="1400" dirty="0"/>
-          </a:p>
-        </p:txBody>
-      </p:sp>
-      <p:sp>
-        <p:nvSpPr>
-          <p:cNvPr id="11" name="Text 9"/>
-          <p:cNvSpPr txBox="1"/>
-          <p:nvPr/>
-        </p:nvSpPr>
-        <p:spPr>
-          <a:xfrm>
-            <a:off x="3383280" y="2980944"/>
-            <a:ext cx="5212080" cy="868680"/>
-          </a:xfrm>
-          <a:prstGeom prst="rect">
-            <a:avLst/>
-          </a:prstGeom>
-          <a:noFill/>
-          <a:ln/>
-        </p:spPr>
-        <p:txBody>
-          <a:bodyPr wrap="square" lIns="0" tIns="0" rIns="0" bIns="0" rtlCol="0" anchor="ctr">
-            <a:normAutofit/>
-          </a:bodyPr>
-          <a:lstStyle/>
-          <a:p>
-            <a:pPr indent="0" marL="0">
-              <a:buNone/>
-            </a:pPr>
-            <a:r>
-              <a:rPr lang="en-US" sz="1700" dirty="0">
+              </a:rPr>
+              <a:t>Newton: caro e pode ir para um máximo</a:t>
+            </a:r>
+            <a:endParaRPr lang="en-US" sz="2400" dirty="0"/>
+          </a:p>
+          <a:p>
+            <a:pPr marL="342900" indent="-342900">
+              <a:spcAft>
+                <a:spcPts val="1400"/>
+              </a:spcAft>
+              <a:buSzPct val="100000"/>
+              <a:buChar char="•"/>
+            </a:pPr>
+            <a:r>
+              <a:rPr lang="en-US" sz="2400" dirty="0">
                 <a:solidFill>
                   <a:srgbClr val="1F2937"/>
                 </a:solidFill>
-                <a:latin typeface="Cambria Math" pitchFamily="34" charset="0"/>
-                <a:ea typeface="Cambria Math" pitchFamily="34" charset="-122"/>
-                <a:cs typeface="Cambria Math" pitchFamily="34" charset="-120"/>
-              </a:rPr>
-              <a:t>(H + τI) d = −g  e busca em linha</a:t>
-            </a:r>
-            <a:endParaRPr lang="en-US" sz="1700" dirty="0"/>
+              </a:rPr>
+              <a:t>Em soma de quadrados, a Jacobiana basta</a:t>
+            </a:r>
+            <a:endParaRPr lang="en-US" sz="2400" dirty="0"/>
           </a:p>
         </p:txBody>
       </p:sp>
@@ -3744,46 +5643,49 @@
                 <a:ea typeface="Calibri" pitchFamily="34" charset="-122"/>
                 <a:cs typeface="Calibri" pitchFamily="34" charset="-120"/>
               </a:rPr>
-              <a:t>Newton modificado</a:t>
+              <a:t>Da série de Taylor a Newton</a:t>
             </a:r>
             <a:endParaRPr lang="en-US" sz="2600" dirty="0"/>
           </a:p>
         </p:txBody>
       </p:sp>
-      <p:pic>
-        <p:nvPicPr>
-          <p:cNvPr id="3" name="Image 0" descr="Somar τ à curvatura vira a parábola para cima.">    </p:cNvPr>
-          <p:cNvPicPr>
-            <a:picLocks noChangeAspect="1"/>
-          </p:cNvPicPr>
-          <p:nvPr/>
-        </p:nvPicPr>
-        <p:blipFill>
-          <a:blip r:embed="rId1"/>
-          <a:stretch>
-            <a:fillRect/>
-          </a:stretch>
-        </p:blipFill>
-        <p:spPr>
-          <a:xfrm>
-            <a:off x="2309573" y="1005840"/>
-            <a:ext cx="4524853" cy="3154680"/>
-          </a:xfrm>
-          <a:prstGeom prst="rect">
-            <a:avLst/>
-          </a:prstGeom>
-        </p:spPr>
-      </p:pic>
-      <p:sp>
-        <p:nvSpPr>
-          <p:cNvPr id="4" name="Text 1"/>
+      <p:sp>
+        <p:nvSpPr>
+          <p:cNvPr id="3" name="Shape 1"/>
+          <p:cNvSpPr/>
+          <p:nvPr/>
+        </p:nvSpPr>
+        <p:spPr>
+          <a:xfrm>
+            <a:off x="457200" y="1097280"/>
+            <a:ext cx="8229600" cy="868680"/>
+          </a:xfrm>
+          <a:prstGeom prst="roundRect">
+            <a:avLst>
+              <a:gd name="adj" fmla="val 8421"/>
+            </a:avLst>
+          </a:prstGeom>
+          <a:solidFill>
+            <a:srgbClr val="E0E7FF"/>
+          </a:solidFill>
+          <a:ln w="9525">
+            <a:solidFill>
+              <a:srgbClr val="C7D2FE"/>
+            </a:solidFill>
+            <a:prstDash val="solid"/>
+          </a:ln>
+        </p:spPr>
+      </p:sp>
+      <p:sp>
+        <p:nvSpPr>
+          <p:cNvPr id="4" name="Text 2"/>
           <p:cNvSpPr txBox="1"/>
           <p:nvPr/>
         </p:nvSpPr>
         <p:spPr>
           <a:xfrm>
-            <a:off x="457200" y="4251960"/>
-            <a:ext cx="8229600" cy="457200"/>
+            <a:off x="594360" y="1097280"/>
+            <a:ext cx="2743200" cy="868680"/>
           </a:xfrm>
           <a:prstGeom prst="rect">
             <a:avLst/>
@@ -3792,23 +5694,276 @@
           <a:ln/>
         </p:spPr>
         <p:txBody>
-          <a:bodyPr wrap="square" lIns="0" tIns="0" rIns="0" bIns="0" rtlCol="0" anchor="t">
+          <a:bodyPr wrap="square" lIns="0" tIns="0" rIns="0" bIns="0" rtlCol="0" anchor="ctr">
             <a:normAutofit/>
           </a:bodyPr>
           <a:lstStyle/>
           <a:p>
-            <a:pPr algn="ctr" indent="0" marL="0">
+            <a:pPr indent="0" marL="0">
               <a:buNone/>
             </a:pPr>
             <a:r>
-              <a:rPr lang="en-US" sz="1400" i="1" dirty="0">
-                <a:solidFill>
-                  <a:srgbClr val="4B5563"/>
-                </a:solidFill>
-              </a:rPr>
-              <a:t>Somar τ à curvatura vira a parábola para cima.</a:t>
+              <a:rPr lang="en-US" sz="1400" b="1" dirty="0">
+                <a:solidFill>
+                  <a:srgbClr val="312E81"/>
+                </a:solidFill>
+              </a:rPr>
+              <a:t>1. Taylor</a:t>
             </a:r>
             <a:endParaRPr lang="en-US" sz="1400" dirty="0"/>
+          </a:p>
+        </p:txBody>
+      </p:sp>
+      <p:sp>
+        <p:nvSpPr>
+          <p:cNvPr id="5" name="Text 3"/>
+          <p:cNvSpPr txBox="1"/>
+          <p:nvPr/>
+        </p:nvSpPr>
+        <p:spPr>
+          <a:xfrm>
+            <a:off x="3383280" y="1097280"/>
+            <a:ext cx="5212080" cy="868680"/>
+          </a:xfrm>
+          <a:prstGeom prst="rect">
+            <a:avLst/>
+          </a:prstGeom>
+          <a:noFill/>
+          <a:ln/>
+        </p:spPr>
+        <p:txBody>
+          <a:bodyPr wrap="square" lIns="0" tIns="0" rIns="0" bIns="0" rtlCol="0" anchor="ctr">
+            <a:normAutofit/>
+          </a:bodyPr>
+          <a:lstStyle/>
+          <a:p>
+            <a:pPr indent="0" marL="0">
+              <a:buNone/>
+            </a:pPr>
+            <a:r>
+              <a:rPr lang="en-US" sz="1700" dirty="0">
+                <a:solidFill>
+                  <a:srgbClr val="1F2937"/>
+                </a:solidFill>
+                <a:latin typeface="Cambria Math" pitchFamily="34" charset="0"/>
+                <a:ea typeface="Cambria Math" pitchFamily="34" charset="-122"/>
+                <a:cs typeface="Cambria Math" pitchFamily="34" charset="-120"/>
+              </a:rPr>
+              <a:t>E(θ+d) ≈ E + gᵀd + ½ dᵀH d</a:t>
+            </a:r>
+            <a:endParaRPr lang="en-US" sz="1700" dirty="0"/>
+          </a:p>
+        </p:txBody>
+      </p:sp>
+      <p:sp>
+        <p:nvSpPr>
+          <p:cNvPr id="6" name="Shape 4"/>
+          <p:cNvSpPr/>
+          <p:nvPr/>
+        </p:nvSpPr>
+        <p:spPr>
+          <a:xfrm>
+            <a:off x="457200" y="2039112"/>
+            <a:ext cx="8229600" cy="868680"/>
+          </a:xfrm>
+          <a:prstGeom prst="roundRect">
+            <a:avLst>
+              <a:gd name="adj" fmla="val 8421"/>
+            </a:avLst>
+          </a:prstGeom>
+          <a:solidFill>
+            <a:srgbClr val="EEF2FF"/>
+          </a:solidFill>
+          <a:ln w="9525">
+            <a:solidFill>
+              <a:srgbClr val="C7D2FE"/>
+            </a:solidFill>
+            <a:prstDash val="solid"/>
+          </a:ln>
+        </p:spPr>
+      </p:sp>
+      <p:sp>
+        <p:nvSpPr>
+          <p:cNvPr id="7" name="Text 5"/>
+          <p:cNvSpPr txBox="1"/>
+          <p:nvPr/>
+        </p:nvSpPr>
+        <p:spPr>
+          <a:xfrm>
+            <a:off x="594360" y="2039112"/>
+            <a:ext cx="2743200" cy="868680"/>
+          </a:xfrm>
+          <a:prstGeom prst="rect">
+            <a:avLst/>
+          </a:prstGeom>
+          <a:noFill/>
+          <a:ln/>
+        </p:spPr>
+        <p:txBody>
+          <a:bodyPr wrap="square" lIns="0" tIns="0" rIns="0" bIns="0" rtlCol="0" anchor="ctr">
+            <a:normAutofit/>
+          </a:bodyPr>
+          <a:lstStyle/>
+          <a:p>
+            <a:pPr indent="0" marL="0">
+              <a:buNone/>
+            </a:pPr>
+            <a:r>
+              <a:rPr lang="en-US" sz="1400" b="1" dirty="0">
+                <a:solidFill>
+                  <a:srgbClr val="312E81"/>
+                </a:solidFill>
+              </a:rPr>
+              <a:t>2. Mínimo do modelo</a:t>
+            </a:r>
+            <a:endParaRPr lang="en-US" sz="1400" dirty="0"/>
+          </a:p>
+        </p:txBody>
+      </p:sp>
+      <p:sp>
+        <p:nvSpPr>
+          <p:cNvPr id="8" name="Text 6"/>
+          <p:cNvSpPr txBox="1"/>
+          <p:nvPr/>
+        </p:nvSpPr>
+        <p:spPr>
+          <a:xfrm>
+            <a:off x="3383280" y="2039112"/>
+            <a:ext cx="5212080" cy="868680"/>
+          </a:xfrm>
+          <a:prstGeom prst="rect">
+            <a:avLst/>
+          </a:prstGeom>
+          <a:noFill/>
+          <a:ln/>
+        </p:spPr>
+        <p:txBody>
+          <a:bodyPr wrap="square" lIns="0" tIns="0" rIns="0" bIns="0" rtlCol="0" anchor="ctr">
+            <a:normAutofit/>
+          </a:bodyPr>
+          <a:lstStyle/>
+          <a:p>
+            <a:pPr indent="0" marL="0">
+              <a:buNone/>
+            </a:pPr>
+            <a:r>
+              <a:rPr lang="en-US" sz="1700" dirty="0">
+                <a:solidFill>
+                  <a:srgbClr val="1F2937"/>
+                </a:solidFill>
+                <a:latin typeface="Cambria Math" pitchFamily="34" charset="0"/>
+                <a:ea typeface="Cambria Math" pitchFamily="34" charset="-122"/>
+                <a:cs typeface="Cambria Math" pitchFamily="34" charset="-120"/>
+              </a:rPr>
+              <a:t>H d = −g</a:t>
+            </a:r>
+            <a:endParaRPr lang="en-US" sz="1700" dirty="0"/>
+          </a:p>
+        </p:txBody>
+      </p:sp>
+      <p:sp>
+        <p:nvSpPr>
+          <p:cNvPr id="9" name="Shape 7"/>
+          <p:cNvSpPr/>
+          <p:nvPr/>
+        </p:nvSpPr>
+        <p:spPr>
+          <a:xfrm>
+            <a:off x="457200" y="2980944"/>
+            <a:ext cx="8229600" cy="868680"/>
+          </a:xfrm>
+          <a:prstGeom prst="roundRect">
+            <a:avLst>
+              <a:gd name="adj" fmla="val 8421"/>
+            </a:avLst>
+          </a:prstGeom>
+          <a:solidFill>
+            <a:srgbClr val="E0E7FF"/>
+          </a:solidFill>
+          <a:ln w="9525">
+            <a:solidFill>
+              <a:srgbClr val="C7D2FE"/>
+            </a:solidFill>
+            <a:prstDash val="solid"/>
+          </a:ln>
+        </p:spPr>
+      </p:sp>
+      <p:sp>
+        <p:nvSpPr>
+          <p:cNvPr id="10" name="Text 8"/>
+          <p:cNvSpPr txBox="1"/>
+          <p:nvPr/>
+        </p:nvSpPr>
+        <p:spPr>
+          <a:xfrm>
+            <a:off x="594360" y="2980944"/>
+            <a:ext cx="2743200" cy="868680"/>
+          </a:xfrm>
+          <a:prstGeom prst="rect">
+            <a:avLst/>
+          </a:prstGeom>
+          <a:noFill/>
+          <a:ln/>
+        </p:spPr>
+        <p:txBody>
+          <a:bodyPr wrap="square" lIns="0" tIns="0" rIns="0" bIns="0" rtlCol="0" anchor="ctr">
+            <a:normAutofit/>
+          </a:bodyPr>
+          <a:lstStyle/>
+          <a:p>
+            <a:pPr indent="0" marL="0">
+              <a:buNone/>
+            </a:pPr>
+            <a:r>
+              <a:rPr lang="en-US" sz="1400" b="1" dirty="0">
+                <a:solidFill>
+                  <a:srgbClr val="312E81"/>
+                </a:solidFill>
+              </a:rPr>
+              <a:t>3. Newton modificado</a:t>
+            </a:r>
+            <a:endParaRPr lang="en-US" sz="1400" dirty="0"/>
+          </a:p>
+        </p:txBody>
+      </p:sp>
+      <p:sp>
+        <p:nvSpPr>
+          <p:cNvPr id="11" name="Text 9"/>
+          <p:cNvSpPr txBox="1"/>
+          <p:nvPr/>
+        </p:nvSpPr>
+        <p:spPr>
+          <a:xfrm>
+            <a:off x="3383280" y="2980944"/>
+            <a:ext cx="5212080" cy="868680"/>
+          </a:xfrm>
+          <a:prstGeom prst="rect">
+            <a:avLst/>
+          </a:prstGeom>
+          <a:noFill/>
+          <a:ln/>
+        </p:spPr>
+        <p:txBody>
+          <a:bodyPr wrap="square" lIns="0" tIns="0" rIns="0" bIns="0" rtlCol="0" anchor="ctr">
+            <a:normAutofit/>
+          </a:bodyPr>
+          <a:lstStyle/>
+          <a:p>
+            <a:pPr indent="0" marL="0">
+              <a:buNone/>
+            </a:pPr>
+            <a:r>
+              <a:rPr lang="en-US" sz="1700" dirty="0">
+                <a:solidFill>
+                  <a:srgbClr val="1F2937"/>
+                </a:solidFill>
+                <a:latin typeface="Cambria Math" pitchFamily="34" charset="0"/>
+                <a:ea typeface="Cambria Math" pitchFamily="34" charset="-122"/>
+                <a:cs typeface="Cambria Math" pitchFamily="34" charset="-120"/>
+              </a:rPr>
+              <a:t>(H + τI) d = −g  e busca em linha</a:t>
+            </a:r>
+            <a:endParaRPr lang="en-US" sz="1700" dirty="0"/>
           </a:p>
         </p:txBody>
       </p:sp>
@@ -3917,7 +6072,7 @@
                 <a:ea typeface="Calibri" pitchFamily="34" charset="-122"/>
                 <a:cs typeface="Calibri" pitchFamily="34" charset="-120"/>
               </a:rPr>
-              <a:t>Gauss–Newton em etapas</a:t>
+              <a:t>Analogia: o cabo de guerra</a:t>
             </a:r>
             <a:endParaRPr lang="en-US" sz="2600" dirty="0"/>
           </a:p>
@@ -3931,20 +6086,20 @@
         </p:nvSpPr>
         <p:spPr>
           <a:xfrm>
-            <a:off x="457200" y="1097280"/>
-            <a:ext cx="8229600" cy="868680"/>
+            <a:off x="548640" y="1188720"/>
+            <a:ext cx="8046720" cy="3108960"/>
           </a:xfrm>
           <a:prstGeom prst="roundRect">
             <a:avLst>
-              <a:gd name="adj" fmla="val 8421"/>
+              <a:gd name="adj" fmla="val 3529"/>
             </a:avLst>
           </a:prstGeom>
           <a:solidFill>
-            <a:srgbClr val="E0E7FF"/>
+            <a:srgbClr val="ECFEFF"/>
           </a:solidFill>
-          <a:ln w="9525">
+          <a:ln w="25400">
             <a:solidFill>
-              <a:srgbClr val="C7D2FE"/>
+              <a:srgbClr val="06B6D4"/>
             </a:solidFill>
             <a:prstDash val="solid"/>
           </a:ln>
@@ -3958,8 +6113,8 @@
         </p:nvSpPr>
         <p:spPr>
           <a:xfrm>
-            <a:off x="594360" y="1097280"/>
-            <a:ext cx="2743200" cy="868680"/>
+            <a:off x="822960" y="1325880"/>
+            <a:ext cx="3657600" cy="365760"/>
           </a:xfrm>
           <a:prstGeom prst="rect">
             <a:avLst/>
@@ -3968,7 +6123,43 @@
           <a:ln/>
         </p:spPr>
         <p:txBody>
-          <a:bodyPr wrap="square" lIns="0" tIns="0" rIns="0" bIns="0" rtlCol="0" anchor="ctr">
+          <a:bodyPr wrap="square" lIns="0" tIns="0" rIns="0" bIns="0" rtlCol="0" anchor="ctr"/>
+          <a:lstStyle/>
+          <a:p>
+            <a:pPr indent="0" marL="0">
+              <a:buNone/>
+            </a:pPr>
+            <a:r>
+              <a:rPr lang="en-US" sz="1400" b="1" spc="300" kern="0" dirty="0">
+                <a:solidFill>
+                  <a:srgbClr val="0E7490"/>
+                </a:solidFill>
+              </a:rPr>
+              <a:t>NO SEU DIA A DIA</a:t>
+            </a:r>
+            <a:endParaRPr lang="en-US" sz="1400" dirty="0"/>
+          </a:p>
+        </p:txBody>
+      </p:sp>
+      <p:sp>
+        <p:nvSpPr>
+          <p:cNvPr id="5" name="Text 3"/>
+          <p:cNvSpPr txBox="1"/>
+          <p:nvPr/>
+        </p:nvSpPr>
+        <p:spPr>
+          <a:xfrm>
+            <a:off x="822960" y="1783080"/>
+            <a:ext cx="7498080" cy="2377440"/>
+          </a:xfrm>
+          <a:prstGeom prst="rect">
+            <a:avLst/>
+          </a:prstGeom>
+          <a:noFill/>
+          <a:ln/>
+        </p:spPr>
+        <p:txBody>
+          <a:bodyPr wrap="square" lIns="0" tIns="0" rIns="0" bIns="0" rtlCol="0" anchor="t">
             <a:normAutofit/>
           </a:bodyPr>
           <a:lstStyle/>
@@ -3977,373 +6168,14 @@
               <a:buNone/>
             </a:pPr>
             <a:r>
-              <a:rPr lang="en-US" sz="1400" b="1" dirty="0">
-                <a:solidFill>
-                  <a:srgbClr val="312E81"/>
-                </a:solidFill>
-              </a:rPr>
-              <a:t>1. Erro</a:t>
-            </a:r>
-            <a:endParaRPr lang="en-US" sz="1400" dirty="0"/>
-          </a:p>
-        </p:txBody>
-      </p:sp>
-      <p:sp>
-        <p:nvSpPr>
-          <p:cNvPr id="5" name="Text 3"/>
-          <p:cNvSpPr txBox="1"/>
-          <p:nvPr/>
-        </p:nvSpPr>
-        <p:spPr>
-          <a:xfrm>
-            <a:off x="3383280" y="1097280"/>
-            <a:ext cx="5212080" cy="868680"/>
-          </a:xfrm>
-          <a:prstGeom prst="rect">
-            <a:avLst/>
-          </a:prstGeom>
-          <a:noFill/>
-          <a:ln/>
-        </p:spPr>
-        <p:txBody>
-          <a:bodyPr wrap="square" lIns="0" tIns="0" rIns="0" bIns="0" rtlCol="0" anchor="ctr">
-            <a:normAutofit/>
-          </a:bodyPr>
-          <a:lstStyle/>
-          <a:p>
-            <a:pPr indent="0" marL="0">
-              <a:buNone/>
-            </a:pPr>
-            <a:r>
-              <a:rPr lang="en-US" sz="1700" dirty="0">
+              <a:rPr lang="en-US" sz="2100" dirty="0">
                 <a:solidFill>
                   <a:srgbClr val="1F2937"/>
                 </a:solidFill>
-                <a:latin typeface="Cambria Math" pitchFamily="34" charset="0"/>
-                <a:ea typeface="Cambria Math" pitchFamily="34" charset="-122"/>
-                <a:cs typeface="Cambria Math" pitchFamily="34" charset="-120"/>
-              </a:rPr>
-              <a:t>E = ½ ‖r‖²</a:t>
-            </a:r>
-            <a:endParaRPr lang="en-US" sz="1700" dirty="0"/>
-          </a:p>
-        </p:txBody>
-      </p:sp>
-      <p:sp>
-        <p:nvSpPr>
-          <p:cNvPr id="6" name="Shape 4"/>
-          <p:cNvSpPr/>
-          <p:nvPr/>
-        </p:nvSpPr>
-        <p:spPr>
-          <a:xfrm>
-            <a:off x="457200" y="2039112"/>
-            <a:ext cx="8229600" cy="868680"/>
-          </a:xfrm>
-          <a:prstGeom prst="roundRect">
-            <a:avLst>
-              <a:gd name="adj" fmla="val 8421"/>
-            </a:avLst>
-          </a:prstGeom>
-          <a:solidFill>
-            <a:srgbClr val="EEF2FF"/>
-          </a:solidFill>
-          <a:ln w="9525">
-            <a:solidFill>
-              <a:srgbClr val="C7D2FE"/>
-            </a:solidFill>
-            <a:prstDash val="solid"/>
-          </a:ln>
-        </p:spPr>
-      </p:sp>
-      <p:sp>
-        <p:nvSpPr>
-          <p:cNvPr id="7" name="Text 5"/>
-          <p:cNvSpPr txBox="1"/>
-          <p:nvPr/>
-        </p:nvSpPr>
-        <p:spPr>
-          <a:xfrm>
-            <a:off x="594360" y="2039112"/>
-            <a:ext cx="2743200" cy="868680"/>
-          </a:xfrm>
-          <a:prstGeom prst="rect">
-            <a:avLst/>
-          </a:prstGeom>
-          <a:noFill/>
-          <a:ln/>
-        </p:spPr>
-        <p:txBody>
-          <a:bodyPr wrap="square" lIns="0" tIns="0" rIns="0" bIns="0" rtlCol="0" anchor="ctr">
-            <a:normAutofit/>
-          </a:bodyPr>
-          <a:lstStyle/>
-          <a:p>
-            <a:pPr indent="0" marL="0">
-              <a:buNone/>
-            </a:pPr>
-            <a:r>
-              <a:rPr lang="en-US" sz="1400" b="1" dirty="0">
-                <a:solidFill>
-                  <a:srgbClr val="312E81"/>
-                </a:solidFill>
-              </a:rPr>
-              <a:t>2. Gradiente</a:t>
-            </a:r>
-            <a:endParaRPr lang="en-US" sz="1400" dirty="0"/>
-          </a:p>
-        </p:txBody>
-      </p:sp>
-      <p:sp>
-        <p:nvSpPr>
-          <p:cNvPr id="8" name="Text 6"/>
-          <p:cNvSpPr txBox="1"/>
-          <p:nvPr/>
-        </p:nvSpPr>
-        <p:spPr>
-          <a:xfrm>
-            <a:off x="3383280" y="2039112"/>
-            <a:ext cx="5212080" cy="868680"/>
-          </a:xfrm>
-          <a:prstGeom prst="rect">
-            <a:avLst/>
-          </a:prstGeom>
-          <a:noFill/>
-          <a:ln/>
-        </p:spPr>
-        <p:txBody>
-          <a:bodyPr wrap="square" lIns="0" tIns="0" rIns="0" bIns="0" rtlCol="0" anchor="ctr">
-            <a:normAutofit/>
-          </a:bodyPr>
-          <a:lstStyle/>
-          <a:p>
-            <a:pPr indent="0" marL="0">
-              <a:buNone/>
-            </a:pPr>
-            <a:r>
-              <a:rPr lang="en-US" sz="1700" dirty="0">
-                <a:solidFill>
-                  <a:srgbClr val="1F2937"/>
-                </a:solidFill>
-                <a:latin typeface="Cambria Math" pitchFamily="34" charset="0"/>
-                <a:ea typeface="Cambria Math" pitchFamily="34" charset="-122"/>
-                <a:cs typeface="Cambria Math" pitchFamily="34" charset="-120"/>
-              </a:rPr>
-              <a:t>g = Jᵀ r</a:t>
-            </a:r>
-            <a:endParaRPr lang="en-US" sz="1700" dirty="0"/>
-          </a:p>
-        </p:txBody>
-      </p:sp>
-      <p:sp>
-        <p:nvSpPr>
-          <p:cNvPr id="9" name="Shape 7"/>
-          <p:cNvSpPr/>
-          <p:nvPr/>
-        </p:nvSpPr>
-        <p:spPr>
-          <a:xfrm>
-            <a:off x="457200" y="2980944"/>
-            <a:ext cx="8229600" cy="868680"/>
-          </a:xfrm>
-          <a:prstGeom prst="roundRect">
-            <a:avLst>
-              <a:gd name="adj" fmla="val 8421"/>
-            </a:avLst>
-          </a:prstGeom>
-          <a:solidFill>
-            <a:srgbClr val="E0E7FF"/>
-          </a:solidFill>
-          <a:ln w="9525">
-            <a:solidFill>
-              <a:srgbClr val="C7D2FE"/>
-            </a:solidFill>
-            <a:prstDash val="solid"/>
-          </a:ln>
-        </p:spPr>
-      </p:sp>
-      <p:sp>
-        <p:nvSpPr>
-          <p:cNvPr id="10" name="Text 8"/>
-          <p:cNvSpPr txBox="1"/>
-          <p:nvPr/>
-        </p:nvSpPr>
-        <p:spPr>
-          <a:xfrm>
-            <a:off x="594360" y="2980944"/>
-            <a:ext cx="2743200" cy="868680"/>
-          </a:xfrm>
-          <a:prstGeom prst="rect">
-            <a:avLst/>
-          </a:prstGeom>
-          <a:noFill/>
-          <a:ln/>
-        </p:spPr>
-        <p:txBody>
-          <a:bodyPr wrap="square" lIns="0" tIns="0" rIns="0" bIns="0" rtlCol="0" anchor="ctr">
-            <a:normAutofit/>
-          </a:bodyPr>
-          <a:lstStyle/>
-          <a:p>
-            <a:pPr indent="0" marL="0">
-              <a:buNone/>
-            </a:pPr>
-            <a:r>
-              <a:rPr lang="en-US" sz="1400" b="1" dirty="0">
-                <a:solidFill>
-                  <a:srgbClr val="312E81"/>
-                </a:solidFill>
-              </a:rPr>
-              <a:t>3. Hessiana</a:t>
-            </a:r>
-            <a:endParaRPr lang="en-US" sz="1400" dirty="0"/>
-          </a:p>
-        </p:txBody>
-      </p:sp>
-      <p:sp>
-        <p:nvSpPr>
-          <p:cNvPr id="11" name="Text 9"/>
-          <p:cNvSpPr txBox="1"/>
-          <p:nvPr/>
-        </p:nvSpPr>
-        <p:spPr>
-          <a:xfrm>
-            <a:off x="3383280" y="2980944"/>
-            <a:ext cx="5212080" cy="868680"/>
-          </a:xfrm>
-          <a:prstGeom prst="rect">
-            <a:avLst/>
-          </a:prstGeom>
-          <a:noFill/>
-          <a:ln/>
-        </p:spPr>
-        <p:txBody>
-          <a:bodyPr wrap="square" lIns="0" tIns="0" rIns="0" bIns="0" rtlCol="0" anchor="ctr">
-            <a:normAutofit/>
-          </a:bodyPr>
-          <a:lstStyle/>
-          <a:p>
-            <a:pPr indent="0" marL="0">
-              <a:buNone/>
-            </a:pPr>
-            <a:r>
-              <a:rPr lang="en-US" sz="1700" dirty="0">
-                <a:solidFill>
-                  <a:srgbClr val="1F2937"/>
-                </a:solidFill>
-                <a:latin typeface="Cambria Math" pitchFamily="34" charset="0"/>
-                <a:ea typeface="Cambria Math" pitchFamily="34" charset="-122"/>
-                <a:cs typeface="Cambria Math" pitchFamily="34" charset="-120"/>
-              </a:rPr>
-              <a:t>H = JᵀJ + S,  S = Σ rᵢ ∇²rᵢ</a:t>
-            </a:r>
-            <a:endParaRPr lang="en-US" sz="1700" dirty="0"/>
-          </a:p>
-        </p:txBody>
-      </p:sp>
-      <p:sp>
-        <p:nvSpPr>
-          <p:cNvPr id="12" name="Shape 10"/>
-          <p:cNvSpPr/>
-          <p:nvPr/>
-        </p:nvSpPr>
-        <p:spPr>
-          <a:xfrm>
-            <a:off x="457200" y="3922776"/>
-            <a:ext cx="8229600" cy="868680"/>
-          </a:xfrm>
-          <a:prstGeom prst="roundRect">
-            <a:avLst>
-              <a:gd name="adj" fmla="val 8421"/>
-            </a:avLst>
-          </a:prstGeom>
-          <a:solidFill>
-            <a:srgbClr val="EEF2FF"/>
-          </a:solidFill>
-          <a:ln w="9525">
-            <a:solidFill>
-              <a:srgbClr val="C7D2FE"/>
-            </a:solidFill>
-            <a:prstDash val="solid"/>
-          </a:ln>
-        </p:spPr>
-      </p:sp>
-      <p:sp>
-        <p:nvSpPr>
-          <p:cNvPr id="13" name="Text 11"/>
-          <p:cNvSpPr txBox="1"/>
-          <p:nvPr/>
-        </p:nvSpPr>
-        <p:spPr>
-          <a:xfrm>
-            <a:off x="594360" y="3922776"/>
-            <a:ext cx="2743200" cy="868680"/>
-          </a:xfrm>
-          <a:prstGeom prst="rect">
-            <a:avLst/>
-          </a:prstGeom>
-          <a:noFill/>
-          <a:ln/>
-        </p:spPr>
-        <p:txBody>
-          <a:bodyPr wrap="square" lIns="0" tIns="0" rIns="0" bIns="0" rtlCol="0" anchor="ctr">
-            <a:normAutofit/>
-          </a:bodyPr>
-          <a:lstStyle/>
-          <a:p>
-            <a:pPr indent="0" marL="0">
-              <a:buNone/>
-            </a:pPr>
-            <a:r>
-              <a:rPr lang="en-US" sz="1400" b="1" dirty="0">
-                <a:solidFill>
-                  <a:srgbClr val="312E81"/>
-                </a:solidFill>
-              </a:rPr>
-              <a:t>4. Gauss–Newton</a:t>
-            </a:r>
-            <a:endParaRPr lang="en-US" sz="1400" dirty="0"/>
-          </a:p>
-        </p:txBody>
-      </p:sp>
-      <p:sp>
-        <p:nvSpPr>
-          <p:cNvPr id="14" name="Text 12"/>
-          <p:cNvSpPr txBox="1"/>
-          <p:nvPr/>
-        </p:nvSpPr>
-        <p:spPr>
-          <a:xfrm>
-            <a:off x="3383280" y="3922776"/>
-            <a:ext cx="5212080" cy="868680"/>
-          </a:xfrm>
-          <a:prstGeom prst="rect">
-            <a:avLst/>
-          </a:prstGeom>
-          <a:noFill/>
-          <a:ln/>
-        </p:spPr>
-        <p:txBody>
-          <a:bodyPr wrap="square" lIns="0" tIns="0" rIns="0" bIns="0" rtlCol="0" anchor="ctr">
-            <a:normAutofit/>
-          </a:bodyPr>
-          <a:lstStyle/>
-          <a:p>
-            <a:pPr indent="0" marL="0">
-              <a:buNone/>
-            </a:pPr>
-            <a:r>
-              <a:rPr lang="en-US" sz="1700" dirty="0">
-                <a:solidFill>
-                  <a:srgbClr val="1F2937"/>
-                </a:solidFill>
-                <a:latin typeface="Cambria Math" pitchFamily="34" charset="0"/>
-                <a:ea typeface="Cambria Math" pitchFamily="34" charset="-122"/>
-                <a:cs typeface="Cambria Math" pitchFamily="34" charset="-120"/>
-              </a:rPr>
-              <a:t>JᵀJ d = −Jᵀ r  (despreza S)</a:t>
-            </a:r>
-            <a:endParaRPr lang="en-US" sz="1700" dirty="0"/>
+              </a:rPr>
+              <a:t>O Levenberg–Marquardt é um cabo de guerra entre dois métodos: o Gauss–Newton, rápido e ousado perto do mínimo, e o gradiente descendente, lento e seguro longe dele. O parâmetro μ é o árbitro: μ pequeno dá a vitória ao Gauss–Newton; μ grande, ao gradiente.</a:t>
+            </a:r>
+            <a:endParaRPr lang="en-US" sz="2100" dirty="0"/>
           </a:p>
         </p:txBody>
       </p:sp>
@@ -4452,49 +6284,46 @@
                 <a:ea typeface="Calibri" pitchFamily="34" charset="-122"/>
                 <a:cs typeface="Calibri" pitchFamily="34" charset="-120"/>
               </a:rPr>
-              <a:t>Levenberg–Marquardt</a:t>
+              <a:t>Newton modificado</a:t>
             </a:r>
             <a:endParaRPr lang="en-US" sz="2600" dirty="0"/>
           </a:p>
         </p:txBody>
       </p:sp>
-      <p:sp>
-        <p:nvSpPr>
-          <p:cNvPr id="3" name="Shape 1"/>
-          <p:cNvSpPr/>
-          <p:nvPr/>
-        </p:nvSpPr>
-        <p:spPr>
-          <a:xfrm>
-            <a:off x="457200" y="1097280"/>
-            <a:ext cx="8229600" cy="868680"/>
-          </a:xfrm>
-          <a:prstGeom prst="roundRect">
-            <a:avLst>
-              <a:gd name="adj" fmla="val 8421"/>
-            </a:avLst>
-          </a:prstGeom>
-          <a:solidFill>
-            <a:srgbClr val="E0E7FF"/>
-          </a:solidFill>
-          <a:ln w="9525">
-            <a:solidFill>
-              <a:srgbClr val="C7D2FE"/>
-            </a:solidFill>
-            <a:prstDash val="solid"/>
-          </a:ln>
-        </p:spPr>
-      </p:sp>
-      <p:sp>
-        <p:nvSpPr>
-          <p:cNvPr id="4" name="Text 2"/>
+      <p:pic>
+        <p:nvPicPr>
+          <p:cNvPr id="3" name="Image 0" descr="Somar τ à curvatura vira a parábola para cima.">    </p:cNvPr>
+          <p:cNvPicPr>
+            <a:picLocks noChangeAspect="1"/>
+          </p:cNvPicPr>
+          <p:nvPr/>
+        </p:nvPicPr>
+        <p:blipFill>
+          <a:blip r:embed="rId1"/>
+          <a:stretch>
+            <a:fillRect/>
+          </a:stretch>
+        </p:blipFill>
+        <p:spPr>
+          <a:xfrm>
+            <a:off x="2309573" y="1005840"/>
+            <a:ext cx="4524853" cy="3154680"/>
+          </a:xfrm>
+          <a:prstGeom prst="rect">
+            <a:avLst/>
+          </a:prstGeom>
+        </p:spPr>
+      </p:pic>
+      <p:sp>
+        <p:nvSpPr>
+          <p:cNvPr id="4" name="Text 1"/>
           <p:cNvSpPr txBox="1"/>
           <p:nvPr/>
         </p:nvSpPr>
         <p:spPr>
           <a:xfrm>
-            <a:off x="594360" y="1097280"/>
-            <a:ext cx="2743200" cy="868680"/>
+            <a:off x="457200" y="4251960"/>
+            <a:ext cx="8229600" cy="457200"/>
           </a:xfrm>
           <a:prstGeom prst="rect">
             <a:avLst/>
@@ -4503,382 +6332,23 @@
           <a:ln/>
         </p:spPr>
         <p:txBody>
-          <a:bodyPr wrap="square" lIns="0" tIns="0" rIns="0" bIns="0" rtlCol="0" anchor="ctr">
+          <a:bodyPr wrap="square" lIns="0" tIns="0" rIns="0" bIns="0" rtlCol="0" anchor="t">
             <a:normAutofit/>
           </a:bodyPr>
           <a:lstStyle/>
           <a:p>
-            <a:pPr indent="0" marL="0">
+            <a:pPr algn="ctr" indent="0" marL="0">
               <a:buNone/>
             </a:pPr>
             <a:r>
-              <a:rPr lang="en-US" sz="1400" b="1" dirty="0">
-                <a:solidFill>
-                  <a:srgbClr val="312E81"/>
-                </a:solidFill>
-              </a:rPr>
-              <a:t>1. Passo</a:t>
+              <a:rPr lang="en-US" sz="1400" i="1" dirty="0">
+                <a:solidFill>
+                  <a:srgbClr val="4B5563"/>
+                </a:solidFill>
+              </a:rPr>
+              <a:t>Somar τ à curvatura vira a parábola para cima.</a:t>
             </a:r>
             <a:endParaRPr lang="en-US" sz="1400" dirty="0"/>
-          </a:p>
-        </p:txBody>
-      </p:sp>
-      <p:sp>
-        <p:nvSpPr>
-          <p:cNvPr id="5" name="Text 3"/>
-          <p:cNvSpPr txBox="1"/>
-          <p:nvPr/>
-        </p:nvSpPr>
-        <p:spPr>
-          <a:xfrm>
-            <a:off x="3383280" y="1097280"/>
-            <a:ext cx="5212080" cy="868680"/>
-          </a:xfrm>
-          <a:prstGeom prst="rect">
-            <a:avLst/>
-          </a:prstGeom>
-          <a:noFill/>
-          <a:ln/>
-        </p:spPr>
-        <p:txBody>
-          <a:bodyPr wrap="square" lIns="0" tIns="0" rIns="0" bIns="0" rtlCol="0" anchor="ctr">
-            <a:normAutofit/>
-          </a:bodyPr>
-          <a:lstStyle/>
-          <a:p>
-            <a:pPr indent="0" marL="0">
-              <a:buNone/>
-            </a:pPr>
-            <a:r>
-              <a:rPr lang="en-US" sz="1700" dirty="0">
-                <a:solidFill>
-                  <a:srgbClr val="1F2937"/>
-                </a:solidFill>
-                <a:latin typeface="Cambria Math" pitchFamily="34" charset="0"/>
-                <a:ea typeface="Cambria Math" pitchFamily="34" charset="-122"/>
-                <a:cs typeface="Cambria Math" pitchFamily="34" charset="-120"/>
-              </a:rPr>
-              <a:t>(JᵀJ + μ I) d = −g</a:t>
-            </a:r>
-            <a:endParaRPr lang="en-US" sz="1700" dirty="0"/>
-          </a:p>
-        </p:txBody>
-      </p:sp>
-      <p:sp>
-        <p:nvSpPr>
-          <p:cNvPr id="6" name="Shape 4"/>
-          <p:cNvSpPr/>
-          <p:nvPr/>
-        </p:nvSpPr>
-        <p:spPr>
-          <a:xfrm>
-            <a:off x="457200" y="2039112"/>
-            <a:ext cx="8229600" cy="868680"/>
-          </a:xfrm>
-          <a:prstGeom prst="roundRect">
-            <a:avLst>
-              <a:gd name="adj" fmla="val 8421"/>
-            </a:avLst>
-          </a:prstGeom>
-          <a:solidFill>
-            <a:srgbClr val="EEF2FF"/>
-          </a:solidFill>
-          <a:ln w="9525">
-            <a:solidFill>
-              <a:srgbClr val="C7D2FE"/>
-            </a:solidFill>
-            <a:prstDash val="solid"/>
-          </a:ln>
-        </p:spPr>
-      </p:sp>
-      <p:sp>
-        <p:nvSpPr>
-          <p:cNvPr id="7" name="Text 5"/>
-          <p:cNvSpPr txBox="1"/>
-          <p:nvPr/>
-        </p:nvSpPr>
-        <p:spPr>
-          <a:xfrm>
-            <a:off x="594360" y="2039112"/>
-            <a:ext cx="2743200" cy="868680"/>
-          </a:xfrm>
-          <a:prstGeom prst="rect">
-            <a:avLst/>
-          </a:prstGeom>
-          <a:noFill/>
-          <a:ln/>
-        </p:spPr>
-        <p:txBody>
-          <a:bodyPr wrap="square" lIns="0" tIns="0" rIns="0" bIns="0" rtlCol="0" anchor="ctr">
-            <a:normAutofit/>
-          </a:bodyPr>
-          <a:lstStyle/>
-          <a:p>
-            <a:pPr indent="0" marL="0">
-              <a:buNone/>
-            </a:pPr>
-            <a:r>
-              <a:rPr lang="en-US" sz="1400" b="1" dirty="0">
-                <a:solidFill>
-                  <a:srgbClr val="312E81"/>
-                </a:solidFill>
-              </a:rPr>
-              <a:t>2. μ → 0</a:t>
-            </a:r>
-            <a:endParaRPr lang="en-US" sz="1400" dirty="0"/>
-          </a:p>
-        </p:txBody>
-      </p:sp>
-      <p:sp>
-        <p:nvSpPr>
-          <p:cNvPr id="8" name="Text 6"/>
-          <p:cNvSpPr txBox="1"/>
-          <p:nvPr/>
-        </p:nvSpPr>
-        <p:spPr>
-          <a:xfrm>
-            <a:off x="3383280" y="2039112"/>
-            <a:ext cx="5212080" cy="868680"/>
-          </a:xfrm>
-          <a:prstGeom prst="rect">
-            <a:avLst/>
-          </a:prstGeom>
-          <a:noFill/>
-          <a:ln/>
-        </p:spPr>
-        <p:txBody>
-          <a:bodyPr wrap="square" lIns="0" tIns="0" rIns="0" bIns="0" rtlCol="0" anchor="ctr">
-            <a:normAutofit/>
-          </a:bodyPr>
-          <a:lstStyle/>
-          <a:p>
-            <a:pPr indent="0" marL="0">
-              <a:buNone/>
-            </a:pPr>
-            <a:r>
-              <a:rPr lang="en-US" sz="1700" dirty="0">
-                <a:solidFill>
-                  <a:srgbClr val="1F2937"/>
-                </a:solidFill>
-                <a:latin typeface="Cambria Math" pitchFamily="34" charset="0"/>
-                <a:ea typeface="Cambria Math" pitchFamily="34" charset="-122"/>
-                <a:cs typeface="Cambria Math" pitchFamily="34" charset="-120"/>
-              </a:rPr>
-              <a:t>Gauss–Newton</a:t>
-            </a:r>
-            <a:endParaRPr lang="en-US" sz="1700" dirty="0"/>
-          </a:p>
-        </p:txBody>
-      </p:sp>
-      <p:sp>
-        <p:nvSpPr>
-          <p:cNvPr id="9" name="Shape 7"/>
-          <p:cNvSpPr/>
-          <p:nvPr/>
-        </p:nvSpPr>
-        <p:spPr>
-          <a:xfrm>
-            <a:off x="457200" y="2980944"/>
-            <a:ext cx="8229600" cy="868680"/>
-          </a:xfrm>
-          <a:prstGeom prst="roundRect">
-            <a:avLst>
-              <a:gd name="adj" fmla="val 8421"/>
-            </a:avLst>
-          </a:prstGeom>
-          <a:solidFill>
-            <a:srgbClr val="E0E7FF"/>
-          </a:solidFill>
-          <a:ln w="9525">
-            <a:solidFill>
-              <a:srgbClr val="C7D2FE"/>
-            </a:solidFill>
-            <a:prstDash val="solid"/>
-          </a:ln>
-        </p:spPr>
-      </p:sp>
-      <p:sp>
-        <p:nvSpPr>
-          <p:cNvPr id="10" name="Text 8"/>
-          <p:cNvSpPr txBox="1"/>
-          <p:nvPr/>
-        </p:nvSpPr>
-        <p:spPr>
-          <a:xfrm>
-            <a:off x="594360" y="2980944"/>
-            <a:ext cx="2743200" cy="868680"/>
-          </a:xfrm>
-          <a:prstGeom prst="rect">
-            <a:avLst/>
-          </a:prstGeom>
-          <a:noFill/>
-          <a:ln/>
-        </p:spPr>
-        <p:txBody>
-          <a:bodyPr wrap="square" lIns="0" tIns="0" rIns="0" bIns="0" rtlCol="0" anchor="ctr">
-            <a:normAutofit/>
-          </a:bodyPr>
-          <a:lstStyle/>
-          <a:p>
-            <a:pPr indent="0" marL="0">
-              <a:buNone/>
-            </a:pPr>
-            <a:r>
-              <a:rPr lang="en-US" sz="1400" b="1" dirty="0">
-                <a:solidFill>
-                  <a:srgbClr val="312E81"/>
-                </a:solidFill>
-              </a:rPr>
-              <a:t>3. μ grande</a:t>
-            </a:r>
-            <a:endParaRPr lang="en-US" sz="1400" dirty="0"/>
-          </a:p>
-        </p:txBody>
-      </p:sp>
-      <p:sp>
-        <p:nvSpPr>
-          <p:cNvPr id="11" name="Text 9"/>
-          <p:cNvSpPr txBox="1"/>
-          <p:nvPr/>
-        </p:nvSpPr>
-        <p:spPr>
-          <a:xfrm>
-            <a:off x="3383280" y="2980944"/>
-            <a:ext cx="5212080" cy="868680"/>
-          </a:xfrm>
-          <a:prstGeom prst="rect">
-            <a:avLst/>
-          </a:prstGeom>
-          <a:noFill/>
-          <a:ln/>
-        </p:spPr>
-        <p:txBody>
-          <a:bodyPr wrap="square" lIns="0" tIns="0" rIns="0" bIns="0" rtlCol="0" anchor="ctr">
-            <a:normAutofit/>
-          </a:bodyPr>
-          <a:lstStyle/>
-          <a:p>
-            <a:pPr indent="0" marL="0">
-              <a:buNone/>
-            </a:pPr>
-            <a:r>
-              <a:rPr lang="en-US" sz="1700" dirty="0">
-                <a:solidFill>
-                  <a:srgbClr val="1F2937"/>
-                </a:solidFill>
-                <a:latin typeface="Cambria Math" pitchFamily="34" charset="0"/>
-                <a:ea typeface="Cambria Math" pitchFamily="34" charset="-122"/>
-                <a:cs typeface="Cambria Math" pitchFamily="34" charset="-120"/>
-              </a:rPr>
-              <a:t>d ≈ −g/μ (gradiente com passo curto)</a:t>
-            </a:r>
-            <a:endParaRPr lang="en-US" sz="1700" dirty="0"/>
-          </a:p>
-        </p:txBody>
-      </p:sp>
-      <p:sp>
-        <p:nvSpPr>
-          <p:cNvPr id="12" name="Shape 10"/>
-          <p:cNvSpPr/>
-          <p:nvPr/>
-        </p:nvSpPr>
-        <p:spPr>
-          <a:xfrm>
-            <a:off x="457200" y="3922776"/>
-            <a:ext cx="8229600" cy="868680"/>
-          </a:xfrm>
-          <a:prstGeom prst="roundRect">
-            <a:avLst>
-              <a:gd name="adj" fmla="val 8421"/>
-            </a:avLst>
-          </a:prstGeom>
-          <a:solidFill>
-            <a:srgbClr val="EEF2FF"/>
-          </a:solidFill>
-          <a:ln w="9525">
-            <a:solidFill>
-              <a:srgbClr val="C7D2FE"/>
-            </a:solidFill>
-            <a:prstDash val="solid"/>
-          </a:ln>
-        </p:spPr>
-      </p:sp>
-      <p:sp>
-        <p:nvSpPr>
-          <p:cNvPr id="13" name="Text 11"/>
-          <p:cNvSpPr txBox="1"/>
-          <p:nvPr/>
-        </p:nvSpPr>
-        <p:spPr>
-          <a:xfrm>
-            <a:off x="594360" y="3922776"/>
-            <a:ext cx="2743200" cy="868680"/>
-          </a:xfrm>
-          <a:prstGeom prst="rect">
-            <a:avLst/>
-          </a:prstGeom>
-          <a:noFill/>
-          <a:ln/>
-        </p:spPr>
-        <p:txBody>
-          <a:bodyPr wrap="square" lIns="0" tIns="0" rIns="0" bIns="0" rtlCol="0" anchor="ctr">
-            <a:normAutofit/>
-          </a:bodyPr>
-          <a:lstStyle/>
-          <a:p>
-            <a:pPr indent="0" marL="0">
-              <a:buNone/>
-            </a:pPr>
-            <a:r>
-              <a:rPr lang="en-US" sz="1400" b="1" dirty="0">
-                <a:solidFill>
-                  <a:srgbClr val="312E81"/>
-                </a:solidFill>
-              </a:rPr>
-              <a:t>4. Aceitar</a:t>
-            </a:r>
-            <a:endParaRPr lang="en-US" sz="1400" dirty="0"/>
-          </a:p>
-        </p:txBody>
-      </p:sp>
-      <p:sp>
-        <p:nvSpPr>
-          <p:cNvPr id="14" name="Text 12"/>
-          <p:cNvSpPr txBox="1"/>
-          <p:nvPr/>
-        </p:nvSpPr>
-        <p:spPr>
-          <a:xfrm>
-            <a:off x="3383280" y="3922776"/>
-            <a:ext cx="5212080" cy="868680"/>
-          </a:xfrm>
-          <a:prstGeom prst="rect">
-            <a:avLst/>
-          </a:prstGeom>
-          <a:noFill/>
-          <a:ln/>
-        </p:spPr>
-        <p:txBody>
-          <a:bodyPr wrap="square" lIns="0" tIns="0" rIns="0" bIns="0" rtlCol="0" anchor="ctr">
-            <a:normAutofit/>
-          </a:bodyPr>
-          <a:lstStyle/>
-          <a:p>
-            <a:pPr indent="0" marL="0">
-              <a:buNone/>
-            </a:pPr>
-            <a:r>
-              <a:rPr lang="en-US" sz="1700" dirty="0">
-                <a:solidFill>
-                  <a:srgbClr val="1F2937"/>
-                </a:solidFill>
-                <a:latin typeface="Cambria Math" pitchFamily="34" charset="0"/>
-                <a:ea typeface="Cambria Math" pitchFamily="34" charset="-122"/>
-                <a:cs typeface="Cambria Math" pitchFamily="34" charset="-120"/>
-              </a:rPr>
-              <a:t>só se E diminui; então μ ← 0,1 μ, senão μ ← 10 μ</a:t>
-            </a:r>
-            <a:endParaRPr lang="en-US" sz="1700" dirty="0"/>
           </a:p>
         </p:txBody>
       </p:sp>
@@ -4987,46 +6457,49 @@
                 <a:ea typeface="Calibri" pitchFamily="34" charset="-122"/>
                 <a:cs typeface="Calibri" pitchFamily="34" charset="-120"/>
               </a:rPr>
-              <a:t>Rosenbrock</a:t>
+              <a:t>Gauss–Newton em etapas</a:t>
             </a:r>
             <a:endParaRPr lang="en-US" sz="2600" dirty="0"/>
           </a:p>
         </p:txBody>
       </p:sp>
-      <p:pic>
-        <p:nvPicPr>
-          <p:cNvPr id="3" name="Image 0" descr="Newton salta; LM segue o vale; GD mal sai do lugar.">    </p:cNvPr>
-          <p:cNvPicPr>
-            <a:picLocks noChangeAspect="1"/>
-          </p:cNvPicPr>
-          <p:nvPr/>
-        </p:nvPicPr>
-        <p:blipFill>
-          <a:blip r:embed="rId1"/>
-          <a:stretch>
-            <a:fillRect/>
-          </a:stretch>
-        </p:blipFill>
-        <p:spPr>
-          <a:xfrm>
-            <a:off x="2363724" y="1005840"/>
-            <a:ext cx="4416552" cy="3154680"/>
-          </a:xfrm>
-          <a:prstGeom prst="rect">
-            <a:avLst/>
-          </a:prstGeom>
-        </p:spPr>
-      </p:pic>
-      <p:sp>
-        <p:nvSpPr>
-          <p:cNvPr id="4" name="Text 1"/>
+      <p:sp>
+        <p:nvSpPr>
+          <p:cNvPr id="3" name="Shape 1"/>
+          <p:cNvSpPr/>
+          <p:nvPr/>
+        </p:nvSpPr>
+        <p:spPr>
+          <a:xfrm>
+            <a:off x="457200" y="1097280"/>
+            <a:ext cx="8229600" cy="868680"/>
+          </a:xfrm>
+          <a:prstGeom prst="roundRect">
+            <a:avLst>
+              <a:gd name="adj" fmla="val 8421"/>
+            </a:avLst>
+          </a:prstGeom>
+          <a:solidFill>
+            <a:srgbClr val="E0E7FF"/>
+          </a:solidFill>
+          <a:ln w="9525">
+            <a:solidFill>
+              <a:srgbClr val="C7D2FE"/>
+            </a:solidFill>
+            <a:prstDash val="solid"/>
+          </a:ln>
+        </p:spPr>
+      </p:sp>
+      <p:sp>
+        <p:nvSpPr>
+          <p:cNvPr id="4" name="Text 2"/>
           <p:cNvSpPr txBox="1"/>
           <p:nvPr/>
         </p:nvSpPr>
         <p:spPr>
           <a:xfrm>
-            <a:off x="457200" y="4251960"/>
-            <a:ext cx="8229600" cy="457200"/>
+            <a:off x="594360" y="1097280"/>
+            <a:ext cx="2743200" cy="868680"/>
           </a:xfrm>
           <a:prstGeom prst="rect">
             <a:avLst/>
@@ -5035,23 +6508,382 @@
           <a:ln/>
         </p:spPr>
         <p:txBody>
-          <a:bodyPr wrap="square" lIns="0" tIns="0" rIns="0" bIns="0" rtlCol="0" anchor="t">
+          <a:bodyPr wrap="square" lIns="0" tIns="0" rIns="0" bIns="0" rtlCol="0" anchor="ctr">
             <a:normAutofit/>
           </a:bodyPr>
           <a:lstStyle/>
           <a:p>
-            <a:pPr algn="ctr" indent="0" marL="0">
+            <a:pPr indent="0" marL="0">
               <a:buNone/>
             </a:pPr>
             <a:r>
-              <a:rPr lang="en-US" sz="1400" i="1" dirty="0">
-                <a:solidFill>
-                  <a:srgbClr val="4B5563"/>
-                </a:solidFill>
-              </a:rPr>
-              <a:t>Newton salta; LM segue o vale; GD mal sai do lugar.</a:t>
+              <a:rPr lang="en-US" sz="1400" b="1" dirty="0">
+                <a:solidFill>
+                  <a:srgbClr val="312E81"/>
+                </a:solidFill>
+              </a:rPr>
+              <a:t>1. Erro</a:t>
             </a:r>
             <a:endParaRPr lang="en-US" sz="1400" dirty="0"/>
+          </a:p>
+        </p:txBody>
+      </p:sp>
+      <p:sp>
+        <p:nvSpPr>
+          <p:cNvPr id="5" name="Text 3"/>
+          <p:cNvSpPr txBox="1"/>
+          <p:nvPr/>
+        </p:nvSpPr>
+        <p:spPr>
+          <a:xfrm>
+            <a:off x="3383280" y="1097280"/>
+            <a:ext cx="5212080" cy="868680"/>
+          </a:xfrm>
+          <a:prstGeom prst="rect">
+            <a:avLst/>
+          </a:prstGeom>
+          <a:noFill/>
+          <a:ln/>
+        </p:spPr>
+        <p:txBody>
+          <a:bodyPr wrap="square" lIns="0" tIns="0" rIns="0" bIns="0" rtlCol="0" anchor="ctr">
+            <a:normAutofit/>
+          </a:bodyPr>
+          <a:lstStyle/>
+          <a:p>
+            <a:pPr indent="0" marL="0">
+              <a:buNone/>
+            </a:pPr>
+            <a:r>
+              <a:rPr lang="en-US" sz="1700" dirty="0">
+                <a:solidFill>
+                  <a:srgbClr val="1F2937"/>
+                </a:solidFill>
+                <a:latin typeface="Cambria Math" pitchFamily="34" charset="0"/>
+                <a:ea typeface="Cambria Math" pitchFamily="34" charset="-122"/>
+                <a:cs typeface="Cambria Math" pitchFamily="34" charset="-120"/>
+              </a:rPr>
+              <a:t>E = ½ ‖r‖²</a:t>
+            </a:r>
+            <a:endParaRPr lang="en-US" sz="1700" dirty="0"/>
+          </a:p>
+        </p:txBody>
+      </p:sp>
+      <p:sp>
+        <p:nvSpPr>
+          <p:cNvPr id="6" name="Shape 4"/>
+          <p:cNvSpPr/>
+          <p:nvPr/>
+        </p:nvSpPr>
+        <p:spPr>
+          <a:xfrm>
+            <a:off x="457200" y="2039112"/>
+            <a:ext cx="8229600" cy="868680"/>
+          </a:xfrm>
+          <a:prstGeom prst="roundRect">
+            <a:avLst>
+              <a:gd name="adj" fmla="val 8421"/>
+            </a:avLst>
+          </a:prstGeom>
+          <a:solidFill>
+            <a:srgbClr val="EEF2FF"/>
+          </a:solidFill>
+          <a:ln w="9525">
+            <a:solidFill>
+              <a:srgbClr val="C7D2FE"/>
+            </a:solidFill>
+            <a:prstDash val="solid"/>
+          </a:ln>
+        </p:spPr>
+      </p:sp>
+      <p:sp>
+        <p:nvSpPr>
+          <p:cNvPr id="7" name="Text 5"/>
+          <p:cNvSpPr txBox="1"/>
+          <p:nvPr/>
+        </p:nvSpPr>
+        <p:spPr>
+          <a:xfrm>
+            <a:off x="594360" y="2039112"/>
+            <a:ext cx="2743200" cy="868680"/>
+          </a:xfrm>
+          <a:prstGeom prst="rect">
+            <a:avLst/>
+          </a:prstGeom>
+          <a:noFill/>
+          <a:ln/>
+        </p:spPr>
+        <p:txBody>
+          <a:bodyPr wrap="square" lIns="0" tIns="0" rIns="0" bIns="0" rtlCol="0" anchor="ctr">
+            <a:normAutofit/>
+          </a:bodyPr>
+          <a:lstStyle/>
+          <a:p>
+            <a:pPr indent="0" marL="0">
+              <a:buNone/>
+            </a:pPr>
+            <a:r>
+              <a:rPr lang="en-US" sz="1400" b="1" dirty="0">
+                <a:solidFill>
+                  <a:srgbClr val="312E81"/>
+                </a:solidFill>
+              </a:rPr>
+              <a:t>2. Gradiente</a:t>
+            </a:r>
+            <a:endParaRPr lang="en-US" sz="1400" dirty="0"/>
+          </a:p>
+        </p:txBody>
+      </p:sp>
+      <p:sp>
+        <p:nvSpPr>
+          <p:cNvPr id="8" name="Text 6"/>
+          <p:cNvSpPr txBox="1"/>
+          <p:nvPr/>
+        </p:nvSpPr>
+        <p:spPr>
+          <a:xfrm>
+            <a:off x="3383280" y="2039112"/>
+            <a:ext cx="5212080" cy="868680"/>
+          </a:xfrm>
+          <a:prstGeom prst="rect">
+            <a:avLst/>
+          </a:prstGeom>
+          <a:noFill/>
+          <a:ln/>
+        </p:spPr>
+        <p:txBody>
+          <a:bodyPr wrap="square" lIns="0" tIns="0" rIns="0" bIns="0" rtlCol="0" anchor="ctr">
+            <a:normAutofit/>
+          </a:bodyPr>
+          <a:lstStyle/>
+          <a:p>
+            <a:pPr indent="0" marL="0">
+              <a:buNone/>
+            </a:pPr>
+            <a:r>
+              <a:rPr lang="en-US" sz="1700" dirty="0">
+                <a:solidFill>
+                  <a:srgbClr val="1F2937"/>
+                </a:solidFill>
+                <a:latin typeface="Cambria Math" pitchFamily="34" charset="0"/>
+                <a:ea typeface="Cambria Math" pitchFamily="34" charset="-122"/>
+                <a:cs typeface="Cambria Math" pitchFamily="34" charset="-120"/>
+              </a:rPr>
+              <a:t>g = Jᵀ r</a:t>
+            </a:r>
+            <a:endParaRPr lang="en-US" sz="1700" dirty="0"/>
+          </a:p>
+        </p:txBody>
+      </p:sp>
+      <p:sp>
+        <p:nvSpPr>
+          <p:cNvPr id="9" name="Shape 7"/>
+          <p:cNvSpPr/>
+          <p:nvPr/>
+        </p:nvSpPr>
+        <p:spPr>
+          <a:xfrm>
+            <a:off x="457200" y="2980944"/>
+            <a:ext cx="8229600" cy="868680"/>
+          </a:xfrm>
+          <a:prstGeom prst="roundRect">
+            <a:avLst>
+              <a:gd name="adj" fmla="val 8421"/>
+            </a:avLst>
+          </a:prstGeom>
+          <a:solidFill>
+            <a:srgbClr val="E0E7FF"/>
+          </a:solidFill>
+          <a:ln w="9525">
+            <a:solidFill>
+              <a:srgbClr val="C7D2FE"/>
+            </a:solidFill>
+            <a:prstDash val="solid"/>
+          </a:ln>
+        </p:spPr>
+      </p:sp>
+      <p:sp>
+        <p:nvSpPr>
+          <p:cNvPr id="10" name="Text 8"/>
+          <p:cNvSpPr txBox="1"/>
+          <p:nvPr/>
+        </p:nvSpPr>
+        <p:spPr>
+          <a:xfrm>
+            <a:off x="594360" y="2980944"/>
+            <a:ext cx="2743200" cy="868680"/>
+          </a:xfrm>
+          <a:prstGeom prst="rect">
+            <a:avLst/>
+          </a:prstGeom>
+          <a:noFill/>
+          <a:ln/>
+        </p:spPr>
+        <p:txBody>
+          <a:bodyPr wrap="square" lIns="0" tIns="0" rIns="0" bIns="0" rtlCol="0" anchor="ctr">
+            <a:normAutofit/>
+          </a:bodyPr>
+          <a:lstStyle/>
+          <a:p>
+            <a:pPr indent="0" marL="0">
+              <a:buNone/>
+            </a:pPr>
+            <a:r>
+              <a:rPr lang="en-US" sz="1400" b="1" dirty="0">
+                <a:solidFill>
+                  <a:srgbClr val="312E81"/>
+                </a:solidFill>
+              </a:rPr>
+              <a:t>3. Hessiana</a:t>
+            </a:r>
+            <a:endParaRPr lang="en-US" sz="1400" dirty="0"/>
+          </a:p>
+        </p:txBody>
+      </p:sp>
+      <p:sp>
+        <p:nvSpPr>
+          <p:cNvPr id="11" name="Text 9"/>
+          <p:cNvSpPr txBox="1"/>
+          <p:nvPr/>
+        </p:nvSpPr>
+        <p:spPr>
+          <a:xfrm>
+            <a:off x="3383280" y="2980944"/>
+            <a:ext cx="5212080" cy="868680"/>
+          </a:xfrm>
+          <a:prstGeom prst="rect">
+            <a:avLst/>
+          </a:prstGeom>
+          <a:noFill/>
+          <a:ln/>
+        </p:spPr>
+        <p:txBody>
+          <a:bodyPr wrap="square" lIns="0" tIns="0" rIns="0" bIns="0" rtlCol="0" anchor="ctr">
+            <a:normAutofit/>
+          </a:bodyPr>
+          <a:lstStyle/>
+          <a:p>
+            <a:pPr indent="0" marL="0">
+              <a:buNone/>
+            </a:pPr>
+            <a:r>
+              <a:rPr lang="en-US" sz="1700" dirty="0">
+                <a:solidFill>
+                  <a:srgbClr val="1F2937"/>
+                </a:solidFill>
+                <a:latin typeface="Cambria Math" pitchFamily="34" charset="0"/>
+                <a:ea typeface="Cambria Math" pitchFamily="34" charset="-122"/>
+                <a:cs typeface="Cambria Math" pitchFamily="34" charset="-120"/>
+              </a:rPr>
+              <a:t>H = JᵀJ + S,  S = Σ rᵢ ∇²rᵢ</a:t>
+            </a:r>
+            <a:endParaRPr lang="en-US" sz="1700" dirty="0"/>
+          </a:p>
+        </p:txBody>
+      </p:sp>
+      <p:sp>
+        <p:nvSpPr>
+          <p:cNvPr id="12" name="Shape 10"/>
+          <p:cNvSpPr/>
+          <p:nvPr/>
+        </p:nvSpPr>
+        <p:spPr>
+          <a:xfrm>
+            <a:off x="457200" y="3922776"/>
+            <a:ext cx="8229600" cy="868680"/>
+          </a:xfrm>
+          <a:prstGeom prst="roundRect">
+            <a:avLst>
+              <a:gd name="adj" fmla="val 8421"/>
+            </a:avLst>
+          </a:prstGeom>
+          <a:solidFill>
+            <a:srgbClr val="EEF2FF"/>
+          </a:solidFill>
+          <a:ln w="9525">
+            <a:solidFill>
+              <a:srgbClr val="C7D2FE"/>
+            </a:solidFill>
+            <a:prstDash val="solid"/>
+          </a:ln>
+        </p:spPr>
+      </p:sp>
+      <p:sp>
+        <p:nvSpPr>
+          <p:cNvPr id="13" name="Text 11"/>
+          <p:cNvSpPr txBox="1"/>
+          <p:nvPr/>
+        </p:nvSpPr>
+        <p:spPr>
+          <a:xfrm>
+            <a:off x="594360" y="3922776"/>
+            <a:ext cx="2743200" cy="868680"/>
+          </a:xfrm>
+          <a:prstGeom prst="rect">
+            <a:avLst/>
+          </a:prstGeom>
+          <a:noFill/>
+          <a:ln/>
+        </p:spPr>
+        <p:txBody>
+          <a:bodyPr wrap="square" lIns="0" tIns="0" rIns="0" bIns="0" rtlCol="0" anchor="ctr">
+            <a:normAutofit/>
+          </a:bodyPr>
+          <a:lstStyle/>
+          <a:p>
+            <a:pPr indent="0" marL="0">
+              <a:buNone/>
+            </a:pPr>
+            <a:r>
+              <a:rPr lang="en-US" sz="1400" b="1" dirty="0">
+                <a:solidFill>
+                  <a:srgbClr val="312E81"/>
+                </a:solidFill>
+              </a:rPr>
+              <a:t>4. Gauss–Newton</a:t>
+            </a:r>
+            <a:endParaRPr lang="en-US" sz="1400" dirty="0"/>
+          </a:p>
+        </p:txBody>
+      </p:sp>
+      <p:sp>
+        <p:nvSpPr>
+          <p:cNvPr id="14" name="Text 12"/>
+          <p:cNvSpPr txBox="1"/>
+          <p:nvPr/>
+        </p:nvSpPr>
+        <p:spPr>
+          <a:xfrm>
+            <a:off x="3383280" y="3922776"/>
+            <a:ext cx="5212080" cy="868680"/>
+          </a:xfrm>
+          <a:prstGeom prst="rect">
+            <a:avLst/>
+          </a:prstGeom>
+          <a:noFill/>
+          <a:ln/>
+        </p:spPr>
+        <p:txBody>
+          <a:bodyPr wrap="square" lIns="0" tIns="0" rIns="0" bIns="0" rtlCol="0" anchor="ctr">
+            <a:normAutofit/>
+          </a:bodyPr>
+          <a:lstStyle/>
+          <a:p>
+            <a:pPr indent="0" marL="0">
+              <a:buNone/>
+            </a:pPr>
+            <a:r>
+              <a:rPr lang="en-US" sz="1700" dirty="0">
+                <a:solidFill>
+                  <a:srgbClr val="1F2937"/>
+                </a:solidFill>
+                <a:latin typeface="Cambria Math" pitchFamily="34" charset="0"/>
+                <a:ea typeface="Cambria Math" pitchFamily="34" charset="-122"/>
+                <a:cs typeface="Cambria Math" pitchFamily="34" charset="-120"/>
+              </a:rPr>
+              <a:t>JᵀJ d = −Jᵀ r  (despreza S)</a:t>
+            </a:r>
+            <a:endParaRPr lang="en-US" sz="1700" dirty="0"/>
           </a:p>
         </p:txBody>
       </p:sp>
@@ -5160,46 +6992,49 @@
                 <a:ea typeface="Calibri" pitchFamily="34" charset="-122"/>
                 <a:cs typeface="Calibri" pitchFamily="34" charset="-120"/>
               </a:rPr>
-              <a:t>Efeito de μ</a:t>
+              <a:t>Levenberg–Marquardt</a:t>
             </a:r>
             <a:endParaRPr lang="en-US" sz="2600" dirty="0"/>
           </a:p>
         </p:txBody>
       </p:sp>
-      <p:pic>
-        <p:nvPicPr>
-          <p:cNvPr id="3" name="Image 0" descr="Comprimento e direção do passo conforme μ.">    </p:cNvPr>
-          <p:cNvPicPr>
-            <a:picLocks noChangeAspect="1"/>
-          </p:cNvPicPr>
-          <p:nvPr/>
-        </p:nvPicPr>
-        <p:blipFill>
-          <a:blip r:embed="rId1"/>
-          <a:stretch>
-            <a:fillRect/>
-          </a:stretch>
-        </p:blipFill>
-        <p:spPr>
-          <a:xfrm>
-            <a:off x="850931" y="1005840"/>
-            <a:ext cx="7442138" cy="3154680"/>
-          </a:xfrm>
-          <a:prstGeom prst="rect">
-            <a:avLst/>
-          </a:prstGeom>
-        </p:spPr>
-      </p:pic>
-      <p:sp>
-        <p:nvSpPr>
-          <p:cNvPr id="4" name="Text 1"/>
+      <p:sp>
+        <p:nvSpPr>
+          <p:cNvPr id="3" name="Shape 1"/>
+          <p:cNvSpPr/>
+          <p:nvPr/>
+        </p:nvSpPr>
+        <p:spPr>
+          <a:xfrm>
+            <a:off x="457200" y="1097280"/>
+            <a:ext cx="8229600" cy="868680"/>
+          </a:xfrm>
+          <a:prstGeom prst="roundRect">
+            <a:avLst>
+              <a:gd name="adj" fmla="val 8421"/>
+            </a:avLst>
+          </a:prstGeom>
+          <a:solidFill>
+            <a:srgbClr val="E0E7FF"/>
+          </a:solidFill>
+          <a:ln w="9525">
+            <a:solidFill>
+              <a:srgbClr val="C7D2FE"/>
+            </a:solidFill>
+            <a:prstDash val="solid"/>
+          </a:ln>
+        </p:spPr>
+      </p:sp>
+      <p:sp>
+        <p:nvSpPr>
+          <p:cNvPr id="4" name="Text 2"/>
           <p:cNvSpPr txBox="1"/>
           <p:nvPr/>
         </p:nvSpPr>
         <p:spPr>
           <a:xfrm>
-            <a:off x="457200" y="4251960"/>
-            <a:ext cx="8229600" cy="457200"/>
+            <a:off x="594360" y="1097280"/>
+            <a:ext cx="2743200" cy="868680"/>
           </a:xfrm>
           <a:prstGeom prst="rect">
             <a:avLst/>
@@ -5208,23 +7043,382 @@
           <a:ln/>
         </p:spPr>
         <p:txBody>
-          <a:bodyPr wrap="square" lIns="0" tIns="0" rIns="0" bIns="0" rtlCol="0" anchor="t">
+          <a:bodyPr wrap="square" lIns="0" tIns="0" rIns="0" bIns="0" rtlCol="0" anchor="ctr">
             <a:normAutofit/>
           </a:bodyPr>
           <a:lstStyle/>
           <a:p>
-            <a:pPr algn="ctr" indent="0" marL="0">
+            <a:pPr indent="0" marL="0">
               <a:buNone/>
             </a:pPr>
             <a:r>
-              <a:rPr lang="en-US" sz="1400" i="1" dirty="0">
-                <a:solidFill>
-                  <a:srgbClr val="4B5563"/>
-                </a:solidFill>
-              </a:rPr>
-              <a:t>Comprimento e direção do passo conforme μ.</a:t>
+              <a:rPr lang="en-US" sz="1400" b="1" dirty="0">
+                <a:solidFill>
+                  <a:srgbClr val="312E81"/>
+                </a:solidFill>
+              </a:rPr>
+              <a:t>1. Passo</a:t>
             </a:r>
             <a:endParaRPr lang="en-US" sz="1400" dirty="0"/>
+          </a:p>
+        </p:txBody>
+      </p:sp>
+      <p:sp>
+        <p:nvSpPr>
+          <p:cNvPr id="5" name="Text 3"/>
+          <p:cNvSpPr txBox="1"/>
+          <p:nvPr/>
+        </p:nvSpPr>
+        <p:spPr>
+          <a:xfrm>
+            <a:off x="3383280" y="1097280"/>
+            <a:ext cx="5212080" cy="868680"/>
+          </a:xfrm>
+          <a:prstGeom prst="rect">
+            <a:avLst/>
+          </a:prstGeom>
+          <a:noFill/>
+          <a:ln/>
+        </p:spPr>
+        <p:txBody>
+          <a:bodyPr wrap="square" lIns="0" tIns="0" rIns="0" bIns="0" rtlCol="0" anchor="ctr">
+            <a:normAutofit/>
+          </a:bodyPr>
+          <a:lstStyle/>
+          <a:p>
+            <a:pPr indent="0" marL="0">
+              <a:buNone/>
+            </a:pPr>
+            <a:r>
+              <a:rPr lang="en-US" sz="1700" dirty="0">
+                <a:solidFill>
+                  <a:srgbClr val="1F2937"/>
+                </a:solidFill>
+                <a:latin typeface="Cambria Math" pitchFamily="34" charset="0"/>
+                <a:ea typeface="Cambria Math" pitchFamily="34" charset="-122"/>
+                <a:cs typeface="Cambria Math" pitchFamily="34" charset="-120"/>
+              </a:rPr>
+              <a:t>(JᵀJ + μ I) d = −g</a:t>
+            </a:r>
+            <a:endParaRPr lang="en-US" sz="1700" dirty="0"/>
+          </a:p>
+        </p:txBody>
+      </p:sp>
+      <p:sp>
+        <p:nvSpPr>
+          <p:cNvPr id="6" name="Shape 4"/>
+          <p:cNvSpPr/>
+          <p:nvPr/>
+        </p:nvSpPr>
+        <p:spPr>
+          <a:xfrm>
+            <a:off x="457200" y="2039112"/>
+            <a:ext cx="8229600" cy="868680"/>
+          </a:xfrm>
+          <a:prstGeom prst="roundRect">
+            <a:avLst>
+              <a:gd name="adj" fmla="val 8421"/>
+            </a:avLst>
+          </a:prstGeom>
+          <a:solidFill>
+            <a:srgbClr val="EEF2FF"/>
+          </a:solidFill>
+          <a:ln w="9525">
+            <a:solidFill>
+              <a:srgbClr val="C7D2FE"/>
+            </a:solidFill>
+            <a:prstDash val="solid"/>
+          </a:ln>
+        </p:spPr>
+      </p:sp>
+      <p:sp>
+        <p:nvSpPr>
+          <p:cNvPr id="7" name="Text 5"/>
+          <p:cNvSpPr txBox="1"/>
+          <p:nvPr/>
+        </p:nvSpPr>
+        <p:spPr>
+          <a:xfrm>
+            <a:off x="594360" y="2039112"/>
+            <a:ext cx="2743200" cy="868680"/>
+          </a:xfrm>
+          <a:prstGeom prst="rect">
+            <a:avLst/>
+          </a:prstGeom>
+          <a:noFill/>
+          <a:ln/>
+        </p:spPr>
+        <p:txBody>
+          <a:bodyPr wrap="square" lIns="0" tIns="0" rIns="0" bIns="0" rtlCol="0" anchor="ctr">
+            <a:normAutofit/>
+          </a:bodyPr>
+          <a:lstStyle/>
+          <a:p>
+            <a:pPr indent="0" marL="0">
+              <a:buNone/>
+            </a:pPr>
+            <a:r>
+              <a:rPr lang="en-US" sz="1400" b="1" dirty="0">
+                <a:solidFill>
+                  <a:srgbClr val="312E81"/>
+                </a:solidFill>
+              </a:rPr>
+              <a:t>2. μ → 0</a:t>
+            </a:r>
+            <a:endParaRPr lang="en-US" sz="1400" dirty="0"/>
+          </a:p>
+        </p:txBody>
+      </p:sp>
+      <p:sp>
+        <p:nvSpPr>
+          <p:cNvPr id="8" name="Text 6"/>
+          <p:cNvSpPr txBox="1"/>
+          <p:nvPr/>
+        </p:nvSpPr>
+        <p:spPr>
+          <a:xfrm>
+            <a:off x="3383280" y="2039112"/>
+            <a:ext cx="5212080" cy="868680"/>
+          </a:xfrm>
+          <a:prstGeom prst="rect">
+            <a:avLst/>
+          </a:prstGeom>
+          <a:noFill/>
+          <a:ln/>
+        </p:spPr>
+        <p:txBody>
+          <a:bodyPr wrap="square" lIns="0" tIns="0" rIns="0" bIns="0" rtlCol="0" anchor="ctr">
+            <a:normAutofit/>
+          </a:bodyPr>
+          <a:lstStyle/>
+          <a:p>
+            <a:pPr indent="0" marL="0">
+              <a:buNone/>
+            </a:pPr>
+            <a:r>
+              <a:rPr lang="en-US" sz="1700" dirty="0">
+                <a:solidFill>
+                  <a:srgbClr val="1F2937"/>
+                </a:solidFill>
+                <a:latin typeface="Cambria Math" pitchFamily="34" charset="0"/>
+                <a:ea typeface="Cambria Math" pitchFamily="34" charset="-122"/>
+                <a:cs typeface="Cambria Math" pitchFamily="34" charset="-120"/>
+              </a:rPr>
+              <a:t>Gauss–Newton</a:t>
+            </a:r>
+            <a:endParaRPr lang="en-US" sz="1700" dirty="0"/>
+          </a:p>
+        </p:txBody>
+      </p:sp>
+      <p:sp>
+        <p:nvSpPr>
+          <p:cNvPr id="9" name="Shape 7"/>
+          <p:cNvSpPr/>
+          <p:nvPr/>
+        </p:nvSpPr>
+        <p:spPr>
+          <a:xfrm>
+            <a:off x="457200" y="2980944"/>
+            <a:ext cx="8229600" cy="868680"/>
+          </a:xfrm>
+          <a:prstGeom prst="roundRect">
+            <a:avLst>
+              <a:gd name="adj" fmla="val 8421"/>
+            </a:avLst>
+          </a:prstGeom>
+          <a:solidFill>
+            <a:srgbClr val="E0E7FF"/>
+          </a:solidFill>
+          <a:ln w="9525">
+            <a:solidFill>
+              <a:srgbClr val="C7D2FE"/>
+            </a:solidFill>
+            <a:prstDash val="solid"/>
+          </a:ln>
+        </p:spPr>
+      </p:sp>
+      <p:sp>
+        <p:nvSpPr>
+          <p:cNvPr id="10" name="Text 8"/>
+          <p:cNvSpPr txBox="1"/>
+          <p:nvPr/>
+        </p:nvSpPr>
+        <p:spPr>
+          <a:xfrm>
+            <a:off x="594360" y="2980944"/>
+            <a:ext cx="2743200" cy="868680"/>
+          </a:xfrm>
+          <a:prstGeom prst="rect">
+            <a:avLst/>
+          </a:prstGeom>
+          <a:noFill/>
+          <a:ln/>
+        </p:spPr>
+        <p:txBody>
+          <a:bodyPr wrap="square" lIns="0" tIns="0" rIns="0" bIns="0" rtlCol="0" anchor="ctr">
+            <a:normAutofit/>
+          </a:bodyPr>
+          <a:lstStyle/>
+          <a:p>
+            <a:pPr indent="0" marL="0">
+              <a:buNone/>
+            </a:pPr>
+            <a:r>
+              <a:rPr lang="en-US" sz="1400" b="1" dirty="0">
+                <a:solidFill>
+                  <a:srgbClr val="312E81"/>
+                </a:solidFill>
+              </a:rPr>
+              <a:t>3. μ grande</a:t>
+            </a:r>
+            <a:endParaRPr lang="en-US" sz="1400" dirty="0"/>
+          </a:p>
+        </p:txBody>
+      </p:sp>
+      <p:sp>
+        <p:nvSpPr>
+          <p:cNvPr id="11" name="Text 9"/>
+          <p:cNvSpPr txBox="1"/>
+          <p:nvPr/>
+        </p:nvSpPr>
+        <p:spPr>
+          <a:xfrm>
+            <a:off x="3383280" y="2980944"/>
+            <a:ext cx="5212080" cy="868680"/>
+          </a:xfrm>
+          <a:prstGeom prst="rect">
+            <a:avLst/>
+          </a:prstGeom>
+          <a:noFill/>
+          <a:ln/>
+        </p:spPr>
+        <p:txBody>
+          <a:bodyPr wrap="square" lIns="0" tIns="0" rIns="0" bIns="0" rtlCol="0" anchor="ctr">
+            <a:normAutofit/>
+          </a:bodyPr>
+          <a:lstStyle/>
+          <a:p>
+            <a:pPr indent="0" marL="0">
+              <a:buNone/>
+            </a:pPr>
+            <a:r>
+              <a:rPr lang="en-US" sz="1700" dirty="0">
+                <a:solidFill>
+                  <a:srgbClr val="1F2937"/>
+                </a:solidFill>
+                <a:latin typeface="Cambria Math" pitchFamily="34" charset="0"/>
+                <a:ea typeface="Cambria Math" pitchFamily="34" charset="-122"/>
+                <a:cs typeface="Cambria Math" pitchFamily="34" charset="-120"/>
+              </a:rPr>
+              <a:t>d ≈ −g/μ (gradiente com passo curto)</a:t>
+            </a:r>
+            <a:endParaRPr lang="en-US" sz="1700" dirty="0"/>
+          </a:p>
+        </p:txBody>
+      </p:sp>
+      <p:sp>
+        <p:nvSpPr>
+          <p:cNvPr id="12" name="Shape 10"/>
+          <p:cNvSpPr/>
+          <p:nvPr/>
+        </p:nvSpPr>
+        <p:spPr>
+          <a:xfrm>
+            <a:off x="457200" y="3922776"/>
+            <a:ext cx="8229600" cy="868680"/>
+          </a:xfrm>
+          <a:prstGeom prst="roundRect">
+            <a:avLst>
+              <a:gd name="adj" fmla="val 8421"/>
+            </a:avLst>
+          </a:prstGeom>
+          <a:solidFill>
+            <a:srgbClr val="EEF2FF"/>
+          </a:solidFill>
+          <a:ln w="9525">
+            <a:solidFill>
+              <a:srgbClr val="C7D2FE"/>
+            </a:solidFill>
+            <a:prstDash val="solid"/>
+          </a:ln>
+        </p:spPr>
+      </p:sp>
+      <p:sp>
+        <p:nvSpPr>
+          <p:cNvPr id="13" name="Text 11"/>
+          <p:cNvSpPr txBox="1"/>
+          <p:nvPr/>
+        </p:nvSpPr>
+        <p:spPr>
+          <a:xfrm>
+            <a:off x="594360" y="3922776"/>
+            <a:ext cx="2743200" cy="868680"/>
+          </a:xfrm>
+          <a:prstGeom prst="rect">
+            <a:avLst/>
+          </a:prstGeom>
+          <a:noFill/>
+          <a:ln/>
+        </p:spPr>
+        <p:txBody>
+          <a:bodyPr wrap="square" lIns="0" tIns="0" rIns="0" bIns="0" rtlCol="0" anchor="ctr">
+            <a:normAutofit/>
+          </a:bodyPr>
+          <a:lstStyle/>
+          <a:p>
+            <a:pPr indent="0" marL="0">
+              <a:buNone/>
+            </a:pPr>
+            <a:r>
+              <a:rPr lang="en-US" sz="1400" b="1" dirty="0">
+                <a:solidFill>
+                  <a:srgbClr val="312E81"/>
+                </a:solidFill>
+              </a:rPr>
+              <a:t>4. Aceitar</a:t>
+            </a:r>
+            <a:endParaRPr lang="en-US" sz="1400" dirty="0"/>
+          </a:p>
+        </p:txBody>
+      </p:sp>
+      <p:sp>
+        <p:nvSpPr>
+          <p:cNvPr id="14" name="Text 12"/>
+          <p:cNvSpPr txBox="1"/>
+          <p:nvPr/>
+        </p:nvSpPr>
+        <p:spPr>
+          <a:xfrm>
+            <a:off x="3383280" y="3922776"/>
+            <a:ext cx="5212080" cy="868680"/>
+          </a:xfrm>
+          <a:prstGeom prst="rect">
+            <a:avLst/>
+          </a:prstGeom>
+          <a:noFill/>
+          <a:ln/>
+        </p:spPr>
+        <p:txBody>
+          <a:bodyPr wrap="square" lIns="0" tIns="0" rIns="0" bIns="0" rtlCol="0" anchor="ctr">
+            <a:normAutofit/>
+          </a:bodyPr>
+          <a:lstStyle/>
+          <a:p>
+            <a:pPr indent="0" marL="0">
+              <a:buNone/>
+            </a:pPr>
+            <a:r>
+              <a:rPr lang="en-US" sz="1700" dirty="0">
+                <a:solidFill>
+                  <a:srgbClr val="1F2937"/>
+                </a:solidFill>
+                <a:latin typeface="Cambria Math" pitchFamily="34" charset="0"/>
+                <a:ea typeface="Cambria Math" pitchFamily="34" charset="-122"/>
+                <a:cs typeface="Cambria Math" pitchFamily="34" charset="-120"/>
+              </a:rPr>
+              <a:t>só se E diminui; então μ ← 0,1 μ, senão μ ← 10 μ</a:t>
+            </a:r>
+            <a:endParaRPr lang="en-US" sz="1700" dirty="0"/>
           </a:p>
         </p:txBody>
       </p:sp>
@@ -5333,22 +7527,46 @@
                 <a:ea typeface="Calibri" pitchFamily="34" charset="-122"/>
                 <a:cs typeface="Calibri" pitchFamily="34" charset="-120"/>
               </a:rPr>
-              <a:t>LMBP: a Jacobiana de uma rede</a:t>
+              <a:t>Rosenbrock</a:t>
             </a:r>
             <a:endParaRPr lang="en-US" sz="2600" dirty="0"/>
           </a:p>
         </p:txBody>
       </p:sp>
-      <p:sp>
-        <p:nvSpPr>
-          <p:cNvPr id="3" name="Text 1"/>
+      <p:pic>
+        <p:nvPicPr>
+          <p:cNvPr id="3" name="Image 0" descr="Newton salta; LM segue o vale; GD mal sai do lugar.">    </p:cNvPr>
+          <p:cNvPicPr>
+            <a:picLocks noChangeAspect="1"/>
+          </p:cNvPicPr>
+          <p:nvPr/>
+        </p:nvPicPr>
+        <p:blipFill>
+          <a:blip r:embed="rId1"/>
+          <a:stretch>
+            <a:fillRect/>
+          </a:stretch>
+        </p:blipFill>
+        <p:spPr>
+          <a:xfrm>
+            <a:off x="2363724" y="1005840"/>
+            <a:ext cx="4416552" cy="3154680"/>
+          </a:xfrm>
+          <a:prstGeom prst="rect">
+            <a:avLst/>
+          </a:prstGeom>
+        </p:spPr>
+      </p:pic>
+      <p:sp>
+        <p:nvSpPr>
+          <p:cNvPr id="4" name="Text 1"/>
           <p:cNvSpPr txBox="1"/>
           <p:nvPr/>
         </p:nvSpPr>
         <p:spPr>
           <a:xfrm>
-            <a:off x="548640" y="1188720"/>
-            <a:ext cx="8046720" cy="3383280"/>
+            <a:off x="457200" y="4251960"/>
+            <a:ext cx="8229600" cy="457200"/>
           </a:xfrm>
           <a:prstGeom prst="rect">
             <a:avLst/>
@@ -5362,76 +7580,18 @@
           </a:bodyPr>
           <a:lstStyle/>
           <a:p>
-            <a:pPr marL="342900" indent="-342900">
-              <a:spcAft>
-                <a:spcPts val="1400"/>
-              </a:spcAft>
-              <a:buSzPct val="100000"/>
-              <a:buChar char="•"/>
-            </a:pPr>
-            <a:r>
-              <a:rPr lang="en-US" sz="2400" dirty="0">
-                <a:solidFill>
-                  <a:srgbClr val="1F2937"/>
-                </a:solidFill>
-              </a:rPr>
-              <a:t>r = y − t tem Nm componentes; J tem Nm × P</a:t>
-            </a:r>
-            <a:endParaRPr lang="en-US" sz="2400" dirty="0"/>
-          </a:p>
-          <a:p>
-            <a:pPr marL="342900" indent="-342900">
-              <a:spcAft>
-                <a:spcPts val="1400"/>
-              </a:spcAft>
-              <a:buSzPct val="100000"/>
-              <a:buChar char="•"/>
-            </a:pPr>
-            <a:r>
-              <a:rPr lang="en-US" sz="2400" dirty="0">
-                <a:solidFill>
-                  <a:srgbClr val="1F2937"/>
-                </a:solidFill>
-              </a:rPr>
-              <a:t>Uma retropropagação por saída preenche as linhas</a:t>
-            </a:r>
-            <a:endParaRPr lang="en-US" sz="2400" dirty="0"/>
-          </a:p>
-          <a:p>
-            <a:pPr marL="342900" indent="-342900">
-              <a:spcAft>
-                <a:spcPts val="1400"/>
-              </a:spcAft>
-              <a:buSzPct val="100000"/>
-              <a:buChar char="•"/>
-            </a:pPr>
-            <a:r>
-              <a:rPr lang="en-US" sz="2400" dirty="0">
-                <a:solidFill>
-                  <a:srgbClr val="1F2937"/>
-                </a:solidFill>
-              </a:rPr>
-              <a:t>Memória O(NmP + P²), custo O(P³) por solução</a:t>
-            </a:r>
-            <a:endParaRPr lang="en-US" sz="2400" dirty="0"/>
-          </a:p>
-          <a:p>
-            <a:pPr marL="342900" indent="-342900">
-              <a:spcAft>
-                <a:spcPts val="1400"/>
-              </a:spcAft>
-              <a:buSzPct val="100000"/>
-              <a:buChar char="•"/>
-            </a:pPr>
-            <a:r>
-              <a:rPr lang="en-US" sz="2400" dirty="0">
-                <a:solidFill>
-                  <a:srgbClr val="1F2937"/>
-                </a:solidFill>
-              </a:rPr>
-              <a:t>Comparado ao scipy.optimize.least_squares: resultados semelhantes</a:t>
-            </a:r>
-            <a:endParaRPr lang="en-US" sz="2400" dirty="0"/>
+            <a:pPr algn="ctr" indent="0" marL="0">
+              <a:buNone/>
+            </a:pPr>
+            <a:r>
+              <a:rPr lang="en-US" sz="1400" i="1" dirty="0">
+                <a:solidFill>
+                  <a:srgbClr val="4B5563"/>
+                </a:solidFill>
+              </a:rPr>
+              <a:t>Newton salta; LM segue o vale; GD mal sai do lugar.</a:t>
+            </a:r>
+            <a:endParaRPr lang="en-US" sz="1400" dirty="0"/>
           </a:p>
         </p:txBody>
       </p:sp>
